--- a/RAM-presentation.pptx
+++ b/RAM-presentation.pptx
@@ -9,13 +9,21 @@
   </p:notesMasterIdLst>
   <p:sldIdLst>
     <p:sldId id="256" r:id="rId6"/>
+    <p:sldId id="265" r:id="rId28"/>
+    <p:sldId id="266" r:id="rId29"/>
     <p:sldId id="257" r:id="rId7"/>
     <p:sldId id="258" r:id="rId8"/>
+    <p:sldId id="267" r:id="rId30"/>
+    <p:sldId id="268" r:id="rId31"/>
+    <p:sldId id="269" r:id="rId32"/>
     <p:sldId id="259" r:id="rId9"/>
+    <p:sldId id="270" r:id="rId33"/>
     <p:sldId id="260" r:id="rId10"/>
     <p:sldId id="261" r:id="rId11"/>
     <p:sldId id="262" r:id="rId12"/>
     <p:sldId id="263" r:id="rId13"/>
+    <p:sldId id="271" r:id="rId34"/>
+    <p:sldId id="272" r:id="rId35"/>
     <p:sldId id="264" r:id="rId14"/>
   </p:sldIdLst>
   <p:sldSz cx="18288000" cy="10287000"/>
@@ -6325,6 +6333,4476 @@
   <p:clrMapOvr>
     <a:masterClrMapping/>
   </p:clrMapOvr>
+</p:sld>
+</file>
+
+<file path=ppt/slides/slide10.xml><?xml version="1.0" encoding="utf-8"?>
+<p:sld xmlns:p="http://schemas.openxmlformats.org/presentationml/2006/main" xmlns:a="http://schemas.openxmlformats.org/drawingml/2006/main" xmlns:r="http://schemas.openxmlformats.org/officeDocument/2006/relationships">
+  <p:cSld>
+    <p:bg>
+      <p:bgPr>
+        <a:solidFill>
+          <a:srgbClr val="06140A"/>
+        </a:solidFill>
+      </p:bgPr>
+    </p:bg>
+    <p:spTree>
+      <p:nvGrpSpPr>
+        <p:cNvPr id="1" name=""/>
+        <p:cNvGrpSpPr/>
+        <p:nvPr/>
+      </p:nvGrpSpPr>
+      <p:grpSpPr>
+        <a:xfrm>
+          <a:off x="0" y="0"/>
+          <a:ext cx="0" cy="0"/>
+          <a:chOff x="0" y="0"/>
+          <a:chExt cx="0" cy="0"/>
+        </a:xfrm>
+      </p:grpSpPr>
+      <p:grpSp>
+        <p:nvGrpSpPr>
+          <p:cNvPr name="Group 2" id="2"/>
+          <p:cNvGrpSpPr/>
+          <p:nvPr/>
+        </p:nvGrpSpPr>
+        <p:grpSpPr>
+          <a:xfrm rot="0">
+            <a:off x="-9525" y="371475"/>
+            <a:ext cx="18306593" cy="57150"/>
+            <a:chOff x="0" y="0"/>
+            <a:chExt cx="24408790" cy="76200"/>
+          </a:xfrm>
+        </p:grpSpPr>
+        <p:sp>
+          <p:nvSpPr>
+            <p:cNvPr name="Freeform 3" id="3"/>
+            <p:cNvSpPr/>
+            <p:nvPr/>
+          </p:nvSpPr>
+          <p:spPr>
+            <a:xfrm flipH="false" flipV="false" rot="0">
+              <a:off x="0" y="0"/>
+              <a:ext cx="24408764" cy="76200"/>
+            </a:xfrm>
+            <a:custGeom>
+              <a:avLst/>
+              <a:gdLst/>
+              <a:ahLst/>
+              <a:cxnLst/>
+              <a:rect r="r" b="b" t="t" l="l"/>
+              <a:pathLst>
+                <a:path h="76200" w="24408764">
+                  <a:moveTo>
+                    <a:pt x="0" y="0"/>
+                  </a:moveTo>
+                  <a:lnTo>
+                    <a:pt x="24408764" y="0"/>
+                  </a:lnTo>
+                  <a:lnTo>
+                    <a:pt x="24408764" y="76200"/>
+                  </a:lnTo>
+                  <a:lnTo>
+                    <a:pt x="0" y="76200"/>
+                  </a:lnTo>
+                  <a:close/>
+                </a:path>
+              </a:pathLst>
+            </a:custGeom>
+            <a:solidFill>
+              <a:srgbClr val="5EE33A"/>
+            </a:solidFill>
+            <a:ln w="19050" cap="sq">
+              <a:solidFill>
+                <a:srgbClr val="5EE33A"/>
+              </a:solidFill>
+              <a:prstDash val="solid"/>
+              <a:miter/>
+            </a:ln>
+          </p:spPr>
+        </p:sp>
+      </p:grpSp>
+      <p:grpSp>
+        <p:nvGrpSpPr>
+          <p:cNvPr name="Group 4" id="4"/>
+          <p:cNvGrpSpPr/>
+          <p:nvPr/>
+        </p:nvGrpSpPr>
+        <p:grpSpPr>
+          <a:xfrm rot="0">
+            <a:off x="-9525" y="9858346"/>
+            <a:ext cx="18306593" cy="57150"/>
+            <a:chOff x="0" y="0"/>
+            <a:chExt cx="24408790" cy="76200"/>
+          </a:xfrm>
+        </p:grpSpPr>
+        <p:sp>
+          <p:nvSpPr>
+            <p:cNvPr name="Freeform 5" id="5"/>
+            <p:cNvSpPr/>
+            <p:nvPr/>
+          </p:nvSpPr>
+          <p:spPr>
+            <a:xfrm flipH="false" flipV="false" rot="0">
+              <a:off x="0" y="0"/>
+              <a:ext cx="24408764" cy="76200"/>
+            </a:xfrm>
+            <a:custGeom>
+              <a:avLst/>
+              <a:gdLst/>
+              <a:ahLst/>
+              <a:cxnLst/>
+              <a:rect r="r" b="b" t="t" l="l"/>
+              <a:pathLst>
+                <a:path h="76200" w="24408764">
+                  <a:moveTo>
+                    <a:pt x="0" y="0"/>
+                  </a:moveTo>
+                  <a:lnTo>
+                    <a:pt x="24408764" y="0"/>
+                  </a:lnTo>
+                  <a:lnTo>
+                    <a:pt x="24408764" y="76200"/>
+                  </a:lnTo>
+                  <a:lnTo>
+                    <a:pt x="0" y="76200"/>
+                  </a:lnTo>
+                  <a:close/>
+                </a:path>
+              </a:pathLst>
+            </a:custGeom>
+            <a:solidFill>
+              <a:srgbClr val="5EE33A"/>
+            </a:solidFill>
+            <a:ln w="19050" cap="sq">
+              <a:solidFill>
+                <a:srgbClr val="5EE33A"/>
+              </a:solidFill>
+              <a:prstDash val="solid"/>
+              <a:miter/>
+            </a:ln>
+          </p:spPr>
+        </p:sp>
+      </p:grpSp>
+      <p:sp>
+        <p:nvSpPr>
+          <p:cNvPr name="Title 101" id="101"/>
+          <p:cNvSpPr txBox="true"/>
+          <p:nvPr/>
+        </p:nvSpPr>
+        <p:spPr>
+          <a:xfrm>
+            <a:off x="1219200" y="1219200"/>
+            <a:ext cx="15849562" cy="900000"/>
+          </a:xfrm>
+          <a:prstGeom prst="rect">
+            <a:avLst/>
+          </a:prstGeom>
+          <a:noFill/>
+        </p:spPr>
+        <p:txBody>
+          <a:bodyPr anchor="t" rtlCol="false" tIns="0" lIns="0" bIns="0" rIns="0">
+            <a:normAutofit/>
+          </a:bodyPr>
+          <a:lstStyle/>
+          <a:p>
+            <a:pPr algn="l">
+              <a:lnSpc>
+                <a:spcPct val="110000"/>
+              </a:lnSpc>
+              <a:spcAft>
+                <a:spcPts val="0"/>
+              </a:spcAft>
+            </a:pPr>
+            <a:r>
+              <a:rPr lang="en-US" sz="4500" b="true">
+                <a:solidFill>
+                  <a:srgbClr val="5EE33A"/>
+                </a:solidFill>
+                <a:latin typeface="Space Mono Bold"/>
+                <a:ea typeface="Space Mono Bold"/>
+                <a:cs typeface="Space Mono Bold"/>
+                <a:sym typeface="Space Mono Bold"/>
+              </a:rPr>
+              <a:t>&gt;TABLE OF CONTENTS</a:t>
+            </a:r>
+          </a:p>
+        </p:txBody>
+      </p:sp>
+      <p:sp>
+        <p:nvSpPr>
+          <p:cNvPr name="Card 102" id="102"/>
+          <p:cNvSpPr txBox="true"/>
+          <p:nvPr/>
+        </p:nvSpPr>
+        <p:spPr>
+          <a:xfrm>
+            <a:off x="1219200" y="3000000"/>
+            <a:ext cx="3699890" cy="2900000"/>
+          </a:xfrm>
+          <a:prstGeom prst="roundRect">
+            <a:avLst>
+              <a:gd name="adj" fmla="val 4000"/>
+            </a:avLst>
+          </a:prstGeom>
+          <a:solidFill>
+            <a:srgbClr val="0C2810"/>
+          </a:solidFill>
+          <a:ln w="28575">
+            <a:solidFill>
+              <a:srgbClr val="2F7D1F"/>
+            </a:solidFill>
+          </a:ln>
+        </p:spPr>
+        <p:txBody>
+          <a:bodyPr anchor="t" rtlCol="false" tIns="270000" lIns="270000" bIns="270000" rIns="270000">
+            <a:normAutofit/>
+          </a:bodyPr>
+          <a:lstStyle/>
+          <a:p>
+            <a:pPr algn="l">
+              <a:lnSpc>
+                <a:spcPct val="110000"/>
+              </a:lnSpc>
+              <a:spcAft>
+                <a:spcPts val="800"/>
+              </a:spcAft>
+            </a:pPr>
+            <a:r>
+              <a:rPr lang="en-US" sz="4500" b="true">
+                <a:solidFill>
+                  <a:srgbClr val="FACC15"/>
+                </a:solidFill>
+                <a:latin typeface="Space Mono Bold"/>
+                <a:ea typeface="Space Mono Bold"/>
+                <a:cs typeface="Space Mono Bold"/>
+                <a:sym typeface="Space Mono Bold"/>
+              </a:rPr>
+              <a:t>01</a:t>
+            </a:r>
+          </a:p>
+          <a:p>
+            <a:pPr algn="l">
+              <a:lnSpc>
+                <a:spcPct val="110000"/>
+              </a:lnSpc>
+              <a:spcAft>
+                <a:spcPts val="0"/>
+              </a:spcAft>
+            </a:pPr>
+            <a:r>
+              <a:rPr lang="en-US" sz="2800">
+                <a:solidFill>
+                  <a:srgbClr val="D9FBC8"/>
+                </a:solidFill>
+                <a:latin typeface="Space Mono"/>
+                <a:ea typeface="Space Mono"/>
+                <a:cs typeface="Space Mono"/>
+                <a:sym typeface="Space Mono"/>
+              </a:rPr>
+              <a:t>Introduction</a:t>
+            </a:r>
+          </a:p>
+        </p:txBody>
+      </p:sp>
+      <p:sp>
+        <p:nvSpPr>
+          <p:cNvPr name="Card 103" id="103"/>
+          <p:cNvSpPr txBox="true"/>
+          <p:nvPr/>
+        </p:nvSpPr>
+        <p:spPr>
+          <a:xfrm>
+            <a:off x="5269090" y="3000000"/>
+            <a:ext cx="3699890" cy="2900000"/>
+          </a:xfrm>
+          <a:prstGeom prst="roundRect">
+            <a:avLst>
+              <a:gd name="adj" fmla="val 4000"/>
+            </a:avLst>
+          </a:prstGeom>
+          <a:solidFill>
+            <a:srgbClr val="0C2810"/>
+          </a:solidFill>
+          <a:ln w="28575">
+            <a:solidFill>
+              <a:srgbClr val="2F7D1F"/>
+            </a:solidFill>
+          </a:ln>
+        </p:spPr>
+        <p:txBody>
+          <a:bodyPr anchor="t" rtlCol="false" tIns="270000" lIns="270000" bIns="270000" rIns="270000">
+            <a:normAutofit/>
+          </a:bodyPr>
+          <a:lstStyle/>
+          <a:p>
+            <a:pPr algn="l">
+              <a:lnSpc>
+                <a:spcPct val="110000"/>
+              </a:lnSpc>
+              <a:spcAft>
+                <a:spcPts val="800"/>
+              </a:spcAft>
+            </a:pPr>
+            <a:r>
+              <a:rPr lang="en-US" sz="4500" b="true">
+                <a:solidFill>
+                  <a:srgbClr val="FACC15"/>
+                </a:solidFill>
+                <a:latin typeface="Space Mono Bold"/>
+                <a:ea typeface="Space Mono Bold"/>
+                <a:cs typeface="Space Mono Bold"/>
+                <a:sym typeface="Space Mono Bold"/>
+              </a:rPr>
+              <a:t>02</a:t>
+            </a:r>
+          </a:p>
+          <a:p>
+            <a:pPr algn="l">
+              <a:lnSpc>
+                <a:spcPct val="110000"/>
+              </a:lnSpc>
+              <a:spcAft>
+                <a:spcPts val="0"/>
+              </a:spcAft>
+            </a:pPr>
+            <a:r>
+              <a:rPr lang="en-US" sz="2800">
+                <a:solidFill>
+                  <a:srgbClr val="D9FBC8"/>
+                </a:solidFill>
+                <a:latin typeface="Space Mono"/>
+                <a:ea typeface="Space Mono"/>
+                <a:cs typeface="Space Mono"/>
+                <a:sym typeface="Space Mono"/>
+              </a:rPr>
+              <a:t>Volatile vs non-volatile</a:t>
+            </a:r>
+          </a:p>
+        </p:txBody>
+      </p:sp>
+      <p:sp>
+        <p:nvSpPr>
+          <p:cNvPr name="Card 104" id="104"/>
+          <p:cNvSpPr txBox="true"/>
+          <p:nvPr/>
+        </p:nvSpPr>
+        <p:spPr>
+          <a:xfrm>
+            <a:off x="9318980" y="3000000"/>
+            <a:ext cx="3699890" cy="2900000"/>
+          </a:xfrm>
+          <a:prstGeom prst="roundRect">
+            <a:avLst>
+              <a:gd name="adj" fmla="val 4000"/>
+            </a:avLst>
+          </a:prstGeom>
+          <a:solidFill>
+            <a:srgbClr val="0C2810"/>
+          </a:solidFill>
+          <a:ln w="28575">
+            <a:solidFill>
+              <a:srgbClr val="2F7D1F"/>
+            </a:solidFill>
+          </a:ln>
+        </p:spPr>
+        <p:txBody>
+          <a:bodyPr anchor="t" rtlCol="false" tIns="270000" lIns="270000" bIns="270000" rIns="270000">
+            <a:normAutofit/>
+          </a:bodyPr>
+          <a:lstStyle/>
+          <a:p>
+            <a:pPr algn="l">
+              <a:lnSpc>
+                <a:spcPct val="110000"/>
+              </a:lnSpc>
+              <a:spcAft>
+                <a:spcPts val="800"/>
+              </a:spcAft>
+            </a:pPr>
+            <a:r>
+              <a:rPr lang="en-US" sz="4500" b="true">
+                <a:solidFill>
+                  <a:srgbClr val="FACC15"/>
+                </a:solidFill>
+                <a:latin typeface="Space Mono Bold"/>
+                <a:ea typeface="Space Mono Bold"/>
+                <a:cs typeface="Space Mono Bold"/>
+                <a:sym typeface="Space Mono Bold"/>
+              </a:rPr>
+              <a:t>03</a:t>
+            </a:r>
+          </a:p>
+          <a:p>
+            <a:pPr algn="l">
+              <a:lnSpc>
+                <a:spcPct val="110000"/>
+              </a:lnSpc>
+              <a:spcAft>
+                <a:spcPts val="0"/>
+              </a:spcAft>
+            </a:pPr>
+            <a:r>
+              <a:rPr lang="en-US" sz="2800">
+                <a:solidFill>
+                  <a:srgbClr val="D9FBC8"/>
+                </a:solidFill>
+                <a:latin typeface="Space Mono"/>
+                <a:ea typeface="Space Mono"/>
+                <a:cs typeface="Space Mono"/>
+                <a:sym typeface="Space Mono"/>
+              </a:rPr>
+              <a:t>RAM vs cache vs ROM</a:t>
+            </a:r>
+          </a:p>
+        </p:txBody>
+      </p:sp>
+      <p:sp>
+        <p:nvSpPr>
+          <p:cNvPr name="Card 105" id="105"/>
+          <p:cNvSpPr txBox="true"/>
+          <p:nvPr/>
+        </p:nvSpPr>
+        <p:spPr>
+          <a:xfrm>
+            <a:off x="13368870" y="3000000"/>
+            <a:ext cx="3699890" cy="2900000"/>
+          </a:xfrm>
+          <a:prstGeom prst="roundRect">
+            <a:avLst>
+              <a:gd name="adj" fmla="val 4000"/>
+            </a:avLst>
+          </a:prstGeom>
+          <a:solidFill>
+            <a:srgbClr val="0C2810"/>
+          </a:solidFill>
+          <a:ln w="28575">
+            <a:solidFill>
+              <a:srgbClr val="2F7D1F"/>
+            </a:solidFill>
+          </a:ln>
+        </p:spPr>
+        <p:txBody>
+          <a:bodyPr anchor="t" rtlCol="false" tIns="270000" lIns="270000" bIns="270000" rIns="270000">
+            <a:normAutofit/>
+          </a:bodyPr>
+          <a:lstStyle/>
+          <a:p>
+            <a:pPr algn="l">
+              <a:lnSpc>
+                <a:spcPct val="110000"/>
+              </a:lnSpc>
+              <a:spcAft>
+                <a:spcPts val="800"/>
+              </a:spcAft>
+            </a:pPr>
+            <a:r>
+              <a:rPr lang="en-US" sz="4500" b="true">
+                <a:solidFill>
+                  <a:srgbClr val="FACC15"/>
+                </a:solidFill>
+                <a:latin typeface="Space Mono Bold"/>
+                <a:ea typeface="Space Mono Bold"/>
+                <a:cs typeface="Space Mono Bold"/>
+                <a:sym typeface="Space Mono Bold"/>
+              </a:rPr>
+              <a:t>04</a:t>
+            </a:r>
+          </a:p>
+          <a:p>
+            <a:pPr algn="l">
+              <a:lnSpc>
+                <a:spcPct val="110000"/>
+              </a:lnSpc>
+              <a:spcAft>
+                <a:spcPts val="0"/>
+              </a:spcAft>
+            </a:pPr>
+            <a:r>
+              <a:rPr lang="en-US" sz="2800">
+                <a:solidFill>
+                  <a:srgbClr val="D9FBC8"/>
+                </a:solidFill>
+                <a:latin typeface="Space Mono"/>
+                <a:ea typeface="Space Mono"/>
+                <a:cs typeface="Space Mono"/>
+                <a:sym typeface="Space Mono"/>
+              </a:rPr>
+              <a:t>Main functions</a:t>
+            </a:r>
+          </a:p>
+        </p:txBody>
+      </p:sp>
+      <p:sp>
+        <p:nvSpPr>
+          <p:cNvPr name="Card 106" id="106"/>
+          <p:cNvSpPr txBox="true"/>
+          <p:nvPr/>
+        </p:nvSpPr>
+        <p:spPr>
+          <a:xfrm>
+            <a:off x="1219200" y="6250000"/>
+            <a:ext cx="3699890" cy="2900000"/>
+          </a:xfrm>
+          <a:prstGeom prst="roundRect">
+            <a:avLst>
+              <a:gd name="adj" fmla="val 4000"/>
+            </a:avLst>
+          </a:prstGeom>
+          <a:solidFill>
+            <a:srgbClr val="0C2810"/>
+          </a:solidFill>
+          <a:ln w="28575">
+            <a:solidFill>
+              <a:srgbClr val="2F7D1F"/>
+            </a:solidFill>
+          </a:ln>
+        </p:spPr>
+        <p:txBody>
+          <a:bodyPr anchor="t" rtlCol="false" tIns="270000" lIns="270000" bIns="270000" rIns="270000">
+            <a:normAutofit/>
+          </a:bodyPr>
+          <a:lstStyle/>
+          <a:p>
+            <a:pPr algn="l">
+              <a:lnSpc>
+                <a:spcPct val="110000"/>
+              </a:lnSpc>
+              <a:spcAft>
+                <a:spcPts val="800"/>
+              </a:spcAft>
+            </a:pPr>
+            <a:r>
+              <a:rPr lang="en-US" sz="4500" b="true">
+                <a:solidFill>
+                  <a:srgbClr val="FACC15"/>
+                </a:solidFill>
+                <a:latin typeface="Space Mono Bold"/>
+                <a:ea typeface="Space Mono Bold"/>
+                <a:cs typeface="Space Mono Bold"/>
+                <a:sym typeface="Space Mono Bold"/>
+              </a:rPr>
+              <a:t>05</a:t>
+            </a:r>
+          </a:p>
+          <a:p>
+            <a:pPr algn="l">
+              <a:lnSpc>
+                <a:spcPct val="110000"/>
+              </a:lnSpc>
+              <a:spcAft>
+                <a:spcPts val="0"/>
+              </a:spcAft>
+            </a:pPr>
+            <a:r>
+              <a:rPr lang="en-US" sz="2800">
+                <a:solidFill>
+                  <a:srgbClr val="D9FBC8"/>
+                </a:solidFill>
+                <a:latin typeface="Space Mono"/>
+                <a:ea typeface="Space Mono"/>
+                <a:cs typeface="Space Mono"/>
+                <a:sym typeface="Space Mono"/>
+              </a:rPr>
+              <a:t>Key specifications</a:t>
+            </a:r>
+          </a:p>
+        </p:txBody>
+      </p:sp>
+      <p:sp>
+        <p:nvSpPr>
+          <p:cNvPr name="Card 107" id="107"/>
+          <p:cNvSpPr txBox="true"/>
+          <p:nvPr/>
+        </p:nvSpPr>
+        <p:spPr>
+          <a:xfrm>
+            <a:off x="5269090" y="6250000"/>
+            <a:ext cx="3699890" cy="2900000"/>
+          </a:xfrm>
+          <a:prstGeom prst="roundRect">
+            <a:avLst>
+              <a:gd name="adj" fmla="val 4000"/>
+            </a:avLst>
+          </a:prstGeom>
+          <a:solidFill>
+            <a:srgbClr val="0C2810"/>
+          </a:solidFill>
+          <a:ln w="28575">
+            <a:solidFill>
+              <a:srgbClr val="2F7D1F"/>
+            </a:solidFill>
+          </a:ln>
+        </p:spPr>
+        <p:txBody>
+          <a:bodyPr anchor="t" rtlCol="false" tIns="270000" lIns="270000" bIns="270000" rIns="270000">
+            <a:normAutofit/>
+          </a:bodyPr>
+          <a:lstStyle/>
+          <a:p>
+            <a:pPr algn="l">
+              <a:lnSpc>
+                <a:spcPct val="110000"/>
+              </a:lnSpc>
+              <a:spcAft>
+                <a:spcPts val="800"/>
+              </a:spcAft>
+            </a:pPr>
+            <a:r>
+              <a:rPr lang="en-US" sz="4500" b="true">
+                <a:solidFill>
+                  <a:srgbClr val="FACC15"/>
+                </a:solidFill>
+                <a:latin typeface="Space Mono Bold"/>
+                <a:ea typeface="Space Mono Bold"/>
+                <a:cs typeface="Space Mono Bold"/>
+                <a:sym typeface="Space Mono Bold"/>
+              </a:rPr>
+              <a:t>06</a:t>
+            </a:r>
+          </a:p>
+          <a:p>
+            <a:pPr algn="l">
+              <a:lnSpc>
+                <a:spcPct val="110000"/>
+              </a:lnSpc>
+              <a:spcAft>
+                <a:spcPts val="0"/>
+              </a:spcAft>
+            </a:pPr>
+            <a:r>
+              <a:rPr lang="en-US" sz="2800">
+                <a:solidFill>
+                  <a:srgbClr val="D9FBC8"/>
+                </a:solidFill>
+                <a:latin typeface="Space Mono"/>
+                <a:ea typeface="Space Mono"/>
+                <a:cs typeface="Space Mono"/>
+                <a:sym typeface="Space Mono"/>
+              </a:rPr>
+              <a:t>Real-world examples</a:t>
+            </a:r>
+          </a:p>
+        </p:txBody>
+      </p:sp>
+      <p:sp>
+        <p:nvSpPr>
+          <p:cNvPr name="Card 108" id="108"/>
+          <p:cNvSpPr txBox="true"/>
+          <p:nvPr/>
+        </p:nvSpPr>
+        <p:spPr>
+          <a:xfrm>
+            <a:off x="9318980" y="6250000"/>
+            <a:ext cx="3699890" cy="2900000"/>
+          </a:xfrm>
+          <a:prstGeom prst="roundRect">
+            <a:avLst>
+              <a:gd name="adj" fmla="val 4000"/>
+            </a:avLst>
+          </a:prstGeom>
+          <a:solidFill>
+            <a:srgbClr val="0C2810"/>
+          </a:solidFill>
+          <a:ln w="28575">
+            <a:solidFill>
+              <a:srgbClr val="2F7D1F"/>
+            </a:solidFill>
+          </a:ln>
+        </p:spPr>
+        <p:txBody>
+          <a:bodyPr anchor="t" rtlCol="false" tIns="270000" lIns="270000" bIns="270000" rIns="270000">
+            <a:normAutofit/>
+          </a:bodyPr>
+          <a:lstStyle/>
+          <a:p>
+            <a:pPr algn="l">
+              <a:lnSpc>
+                <a:spcPct val="110000"/>
+              </a:lnSpc>
+              <a:spcAft>
+                <a:spcPts val="800"/>
+              </a:spcAft>
+            </a:pPr>
+            <a:r>
+              <a:rPr lang="en-US" sz="4500" b="true">
+                <a:solidFill>
+                  <a:srgbClr val="FACC15"/>
+                </a:solidFill>
+                <a:latin typeface="Space Mono Bold"/>
+                <a:ea typeface="Space Mono Bold"/>
+                <a:cs typeface="Space Mono Bold"/>
+                <a:sym typeface="Space Mono Bold"/>
+              </a:rPr>
+              <a:t>07</a:t>
+            </a:r>
+          </a:p>
+          <a:p>
+            <a:pPr algn="l">
+              <a:lnSpc>
+                <a:spcPct val="110000"/>
+              </a:lnSpc>
+              <a:spcAft>
+                <a:spcPts val="0"/>
+              </a:spcAft>
+            </a:pPr>
+            <a:r>
+              <a:rPr lang="en-US" sz="2800">
+                <a:solidFill>
+                  <a:srgbClr val="D9FBC8"/>
+                </a:solidFill>
+                <a:latin typeface="Space Mono"/>
+                <a:ea typeface="Space Mono"/>
+                <a:cs typeface="Space Mono"/>
+                <a:sym typeface="Space Mono"/>
+              </a:rPr>
+              <a:t>References</a:t>
+            </a:r>
+          </a:p>
+        </p:txBody>
+      </p:sp>
+      <p:sp>
+        <p:nvSpPr>
+          <p:cNvPr name="Card 109" id="109"/>
+          <p:cNvSpPr txBox="true"/>
+          <p:nvPr/>
+        </p:nvSpPr>
+        <p:spPr>
+          <a:xfrm>
+            <a:off x="13368870" y="6250000"/>
+            <a:ext cx="3699890" cy="2900000"/>
+          </a:xfrm>
+          <a:prstGeom prst="roundRect">
+            <a:avLst>
+              <a:gd name="adj" fmla="val 4000"/>
+            </a:avLst>
+          </a:prstGeom>
+          <a:solidFill>
+            <a:srgbClr val="0C2810"/>
+          </a:solidFill>
+          <a:ln w="28575">
+            <a:solidFill>
+              <a:srgbClr val="2F7D1F"/>
+            </a:solidFill>
+          </a:ln>
+        </p:spPr>
+        <p:txBody>
+          <a:bodyPr anchor="t" rtlCol="false" tIns="270000" lIns="270000" bIns="270000" rIns="270000">
+            <a:normAutofit/>
+          </a:bodyPr>
+          <a:lstStyle/>
+          <a:p>
+            <a:pPr algn="l">
+              <a:lnSpc>
+                <a:spcPct val="110000"/>
+              </a:lnSpc>
+              <a:spcAft>
+                <a:spcPts val="800"/>
+              </a:spcAft>
+            </a:pPr>
+            <a:r>
+              <a:rPr lang="en-US" sz="4500" b="true">
+                <a:solidFill>
+                  <a:srgbClr val="FACC15"/>
+                </a:solidFill>
+                <a:latin typeface="Space Mono Bold"/>
+                <a:ea typeface="Space Mono Bold"/>
+                <a:cs typeface="Space Mono Bold"/>
+                <a:sym typeface="Space Mono Bold"/>
+              </a:rPr>
+              <a:t>08</a:t>
+            </a:r>
+          </a:p>
+          <a:p>
+            <a:pPr algn="l">
+              <a:lnSpc>
+                <a:spcPct val="110000"/>
+              </a:lnSpc>
+              <a:spcAft>
+                <a:spcPts val="0"/>
+              </a:spcAft>
+            </a:pPr>
+            <a:r>
+              <a:rPr lang="en-US" sz="2800">
+                <a:solidFill>
+                  <a:srgbClr val="D9FBC8"/>
+                </a:solidFill>
+                <a:latin typeface="Space Mono"/>
+                <a:ea typeface="Space Mono"/>
+                <a:cs typeface="Space Mono"/>
+                <a:sym typeface="Space Mono"/>
+              </a:rPr>
+              <a:t>Kahoot quiz</a:t>
+            </a:r>
+          </a:p>
+        </p:txBody>
+      </p:sp>
+    </p:spTree>
+  </p:cSld>
+  <p:clrMapOvr>
+    <a:masterClrMapping/>
+  </p:clrMapOvr>
+  <p:transition spd="slow">
+    <p:push dir="l"/>
+  </p:transition>
+</p:sld>
+</file>
+
+<file path=ppt/slides/slide11.xml><?xml version="1.0" encoding="utf-8"?>
+<p:sld xmlns:p="http://schemas.openxmlformats.org/presentationml/2006/main" xmlns:a="http://schemas.openxmlformats.org/drawingml/2006/main" xmlns:r="http://schemas.openxmlformats.org/officeDocument/2006/relationships">
+  <p:cSld>
+    <p:bg>
+      <p:bgPr>
+        <a:solidFill>
+          <a:srgbClr val="06140A"/>
+        </a:solidFill>
+      </p:bgPr>
+    </p:bg>
+    <p:spTree>
+      <p:nvGrpSpPr>
+        <p:cNvPr id="1" name=""/>
+        <p:cNvGrpSpPr/>
+        <p:nvPr/>
+      </p:nvGrpSpPr>
+      <p:grpSpPr>
+        <a:xfrm>
+          <a:off x="0" y="0"/>
+          <a:ext cx="0" cy="0"/>
+          <a:chOff x="0" y="0"/>
+          <a:chExt cx="0" cy="0"/>
+        </a:xfrm>
+      </p:grpSpPr>
+      <p:grpSp>
+        <p:nvGrpSpPr>
+          <p:cNvPr name="Group 2" id="2"/>
+          <p:cNvGrpSpPr/>
+          <p:nvPr/>
+        </p:nvGrpSpPr>
+        <p:grpSpPr>
+          <a:xfrm rot="0">
+            <a:off x="-9525" y="371475"/>
+            <a:ext cx="18306593" cy="57150"/>
+            <a:chOff x="0" y="0"/>
+            <a:chExt cx="24408790" cy="76200"/>
+          </a:xfrm>
+        </p:grpSpPr>
+        <p:sp>
+          <p:nvSpPr>
+            <p:cNvPr name="Freeform 3" id="3"/>
+            <p:cNvSpPr/>
+            <p:nvPr/>
+          </p:nvSpPr>
+          <p:spPr>
+            <a:xfrm flipH="false" flipV="false" rot="0">
+              <a:off x="0" y="0"/>
+              <a:ext cx="24408764" cy="76200"/>
+            </a:xfrm>
+            <a:custGeom>
+              <a:avLst/>
+              <a:gdLst/>
+              <a:ahLst/>
+              <a:cxnLst/>
+              <a:rect r="r" b="b" t="t" l="l"/>
+              <a:pathLst>
+                <a:path h="76200" w="24408764">
+                  <a:moveTo>
+                    <a:pt x="0" y="0"/>
+                  </a:moveTo>
+                  <a:lnTo>
+                    <a:pt x="24408764" y="0"/>
+                  </a:lnTo>
+                  <a:lnTo>
+                    <a:pt x="24408764" y="76200"/>
+                  </a:lnTo>
+                  <a:lnTo>
+                    <a:pt x="0" y="76200"/>
+                  </a:lnTo>
+                  <a:close/>
+                </a:path>
+              </a:pathLst>
+            </a:custGeom>
+            <a:solidFill>
+              <a:srgbClr val="5EE33A"/>
+            </a:solidFill>
+            <a:ln w="19050" cap="sq">
+              <a:solidFill>
+                <a:srgbClr val="5EE33A"/>
+              </a:solidFill>
+              <a:prstDash val="solid"/>
+              <a:miter/>
+            </a:ln>
+          </p:spPr>
+        </p:sp>
+      </p:grpSp>
+      <p:grpSp>
+        <p:nvGrpSpPr>
+          <p:cNvPr name="Group 4" id="4"/>
+          <p:cNvGrpSpPr/>
+          <p:nvPr/>
+        </p:nvGrpSpPr>
+        <p:grpSpPr>
+          <a:xfrm rot="0">
+            <a:off x="-9525" y="9858346"/>
+            <a:ext cx="18306593" cy="57150"/>
+            <a:chOff x="0" y="0"/>
+            <a:chExt cx="24408790" cy="76200"/>
+          </a:xfrm>
+        </p:grpSpPr>
+        <p:sp>
+          <p:nvSpPr>
+            <p:cNvPr name="Freeform 5" id="5"/>
+            <p:cNvSpPr/>
+            <p:nvPr/>
+          </p:nvSpPr>
+          <p:spPr>
+            <a:xfrm flipH="false" flipV="false" rot="0">
+              <a:off x="0" y="0"/>
+              <a:ext cx="24408764" cy="76200"/>
+            </a:xfrm>
+            <a:custGeom>
+              <a:avLst/>
+              <a:gdLst/>
+              <a:ahLst/>
+              <a:cxnLst/>
+              <a:rect r="r" b="b" t="t" l="l"/>
+              <a:pathLst>
+                <a:path h="76200" w="24408764">
+                  <a:moveTo>
+                    <a:pt x="0" y="0"/>
+                  </a:moveTo>
+                  <a:lnTo>
+                    <a:pt x="24408764" y="0"/>
+                  </a:lnTo>
+                  <a:lnTo>
+                    <a:pt x="24408764" y="76200"/>
+                  </a:lnTo>
+                  <a:lnTo>
+                    <a:pt x="0" y="76200"/>
+                  </a:lnTo>
+                  <a:close/>
+                </a:path>
+              </a:pathLst>
+            </a:custGeom>
+            <a:solidFill>
+              <a:srgbClr val="5EE33A"/>
+            </a:solidFill>
+            <a:ln w="19050" cap="sq">
+              <a:solidFill>
+                <a:srgbClr val="5EE33A"/>
+              </a:solidFill>
+              <a:prstDash val="solid"/>
+              <a:miter/>
+            </a:ln>
+          </p:spPr>
+        </p:sp>
+      </p:grpSp>
+      <p:sp>
+        <p:nvSpPr>
+          <p:cNvPr name="Title 110" id="110"/>
+          <p:cNvSpPr txBox="true"/>
+          <p:nvPr/>
+        </p:nvSpPr>
+        <p:spPr>
+          <a:xfrm>
+            <a:off x="1219200" y="1219200"/>
+            <a:ext cx="15849562" cy="900000"/>
+          </a:xfrm>
+          <a:prstGeom prst="rect">
+            <a:avLst/>
+          </a:prstGeom>
+          <a:noFill/>
+        </p:spPr>
+        <p:txBody>
+          <a:bodyPr anchor="t" rtlCol="false" tIns="0" lIns="0" bIns="0" rIns="0">
+            <a:normAutofit/>
+          </a:bodyPr>
+          <a:lstStyle/>
+          <a:p>
+            <a:pPr algn="l">
+              <a:lnSpc>
+                <a:spcPct val="110000"/>
+              </a:lnSpc>
+              <a:spcAft>
+                <a:spcPts val="0"/>
+              </a:spcAft>
+            </a:pPr>
+            <a:r>
+              <a:rPr lang="en-US" sz="4500" b="true">
+                <a:solidFill>
+                  <a:srgbClr val="5EE33A"/>
+                </a:solidFill>
+                <a:latin typeface="Space Mono Bold"/>
+                <a:ea typeface="Space Mono Bold"/>
+                <a:cs typeface="Space Mono Bold"/>
+                <a:sym typeface="Space Mono Bold"/>
+              </a:rPr>
+              <a:t>&gt;INTRODUCTION</a:t>
+            </a:r>
+          </a:p>
+        </p:txBody>
+      </p:sp>
+      <p:sp>
+        <p:nvSpPr>
+          <p:cNvPr name="Subtitle 111" id="111"/>
+          <p:cNvSpPr txBox="true"/>
+          <p:nvPr/>
+        </p:nvSpPr>
+        <p:spPr>
+          <a:xfrm>
+            <a:off x="1219200" y="2219315"/>
+            <a:ext cx="15849562" cy="700000"/>
+          </a:xfrm>
+          <a:prstGeom prst="rect">
+            <a:avLst/>
+          </a:prstGeom>
+          <a:noFill/>
+        </p:spPr>
+        <p:txBody>
+          <a:bodyPr anchor="t" rtlCol="false" tIns="0" lIns="0" bIns="0" rIns="0">
+            <a:normAutofit/>
+          </a:bodyPr>
+          <a:lstStyle/>
+          <a:p>
+            <a:pPr algn="l">
+              <a:lnSpc>
+                <a:spcPct val="110000"/>
+              </a:lnSpc>
+              <a:spcAft>
+                <a:spcPts val="0"/>
+              </a:spcAft>
+            </a:pPr>
+            <a:r>
+              <a:rPr lang="en-US" sz="2100">
+                <a:solidFill>
+                  <a:srgbClr val="FACC15"/>
+                </a:solidFill>
+                <a:latin typeface="Space Mono"/>
+                <a:ea typeface="Space Mono"/>
+                <a:cs typeface="Space Mono"/>
+                <a:sym typeface="Space Mono"/>
+              </a:rPr>
+              <a:t>RAM = Random Access Memory</a:t>
+            </a:r>
+          </a:p>
+        </p:txBody>
+      </p:sp>
+      <p:sp>
+        <p:nvSpPr>
+          <p:cNvPr name="Card 112" id="112"/>
+          <p:cNvSpPr txBox="true"/>
+          <p:nvPr/>
+        </p:nvSpPr>
+        <p:spPr>
+          <a:xfrm>
+            <a:off x="1219200" y="3100000"/>
+            <a:ext cx="7749781" cy="2900000"/>
+          </a:xfrm>
+          <a:prstGeom prst="roundRect">
+            <a:avLst>
+              <a:gd name="adj" fmla="val 4000"/>
+            </a:avLst>
+          </a:prstGeom>
+          <a:solidFill>
+            <a:srgbClr val="0C2810"/>
+          </a:solidFill>
+          <a:ln w="28575">
+            <a:solidFill>
+              <a:srgbClr val="2F7D1F"/>
+            </a:solidFill>
+          </a:ln>
+        </p:spPr>
+        <p:txBody>
+          <a:bodyPr anchor="t" rtlCol="false" tIns="270000" lIns="270000" bIns="270000" rIns="270000">
+            <a:normAutofit/>
+          </a:bodyPr>
+          <a:lstStyle/>
+          <a:p>
+            <a:pPr algn="l">
+              <a:lnSpc>
+                <a:spcPct val="110000"/>
+              </a:lnSpc>
+              <a:spcAft>
+                <a:spcPts val="900"/>
+              </a:spcAft>
+            </a:pPr>
+            <a:r>
+              <a:rPr lang="en-US" sz="3400" b="true">
+                <a:solidFill>
+                  <a:srgbClr val="5EE33A"/>
+                </a:solidFill>
+                <a:latin typeface="Space Mono Bold"/>
+                <a:ea typeface="Space Mono Bold"/>
+                <a:cs typeface="Space Mono Bold"/>
+                <a:sym typeface="Space Mono Bold"/>
+              </a:rPr>
+              <a:t>What is RAM?</a:t>
+            </a:r>
+          </a:p>
+          <a:p>
+            <a:pPr algn="l">
+              <a:lnSpc>
+                <a:spcPct val="110000"/>
+              </a:lnSpc>
+              <a:spcAft>
+                <a:spcPts val="600"/>
+              </a:spcAft>
+            </a:pPr>
+            <a:r>
+              <a:rPr lang="en-US" sz="2800">
+                <a:solidFill>
+                  <a:srgbClr val="D9FBC8"/>
+                </a:solidFill>
+                <a:latin typeface="Space Mono"/>
+                <a:ea typeface="Space Mono"/>
+                <a:cs typeface="Space Mono"/>
+                <a:sym typeface="Space Mono"/>
+              </a:rPr>
+              <a:t>RAM is the main memory of a computer.</a:t>
+            </a:r>
+          </a:p>
+        </p:txBody>
+      </p:sp>
+      <p:sp>
+        <p:nvSpPr>
+          <p:cNvPr name="Card 113" id="113"/>
+          <p:cNvSpPr txBox="true"/>
+          <p:nvPr/>
+        </p:nvSpPr>
+        <p:spPr>
+          <a:xfrm>
+            <a:off x="9318981" y="3100000"/>
+            <a:ext cx="7749781" cy="2900000"/>
+          </a:xfrm>
+          <a:prstGeom prst="roundRect">
+            <a:avLst>
+              <a:gd name="adj" fmla="val 4000"/>
+            </a:avLst>
+          </a:prstGeom>
+          <a:solidFill>
+            <a:srgbClr val="0C2810"/>
+          </a:solidFill>
+          <a:ln w="28575">
+            <a:solidFill>
+              <a:srgbClr val="2F7D1F"/>
+            </a:solidFill>
+          </a:ln>
+        </p:spPr>
+        <p:txBody>
+          <a:bodyPr anchor="t" rtlCol="false" tIns="270000" lIns="270000" bIns="270000" rIns="270000">
+            <a:normAutofit/>
+          </a:bodyPr>
+          <a:lstStyle/>
+          <a:p>
+            <a:pPr algn="l">
+              <a:lnSpc>
+                <a:spcPct val="110000"/>
+              </a:lnSpc>
+              <a:spcAft>
+                <a:spcPts val="900"/>
+              </a:spcAft>
+            </a:pPr>
+            <a:r>
+              <a:rPr lang="en-US" sz="3400" b="true">
+                <a:solidFill>
+                  <a:srgbClr val="5EE33A"/>
+                </a:solidFill>
+                <a:latin typeface="Space Mono Bold"/>
+                <a:ea typeface="Space Mono Bold"/>
+                <a:cs typeface="Space Mono Bold"/>
+                <a:sym typeface="Space Mono Bold"/>
+              </a:rPr>
+              <a:t>What does it store?</a:t>
+            </a:r>
+          </a:p>
+          <a:p>
+            <a:pPr algn="l">
+              <a:lnSpc>
+                <a:spcPct val="110000"/>
+              </a:lnSpc>
+              <a:spcAft>
+                <a:spcPts val="600"/>
+              </a:spcAft>
+            </a:pPr>
+            <a:r>
+              <a:rPr lang="en-US" sz="2800">
+                <a:solidFill>
+                  <a:srgbClr val="D9FBC8"/>
+                </a:solidFill>
+                <a:latin typeface="Space Mono"/>
+                <a:ea typeface="Space Mono"/>
+                <a:cs typeface="Space Mono"/>
+                <a:sym typeface="Space Mono"/>
+              </a:rPr>
+              <a:t>The data and instructions the CPU is using right now: the operating system, open programs and files you edit.</a:t>
+            </a:r>
+          </a:p>
+        </p:txBody>
+      </p:sp>
+      <p:sp>
+        <p:nvSpPr>
+          <p:cNvPr name="Card 114" id="114"/>
+          <p:cNvSpPr txBox="true"/>
+          <p:nvPr/>
+        </p:nvSpPr>
+        <p:spPr>
+          <a:xfrm>
+            <a:off x="1219200" y="6350000"/>
+            <a:ext cx="7749781" cy="2900000"/>
+          </a:xfrm>
+          <a:prstGeom prst="roundRect">
+            <a:avLst>
+              <a:gd name="adj" fmla="val 4000"/>
+            </a:avLst>
+          </a:prstGeom>
+          <a:solidFill>
+            <a:srgbClr val="0C2810"/>
+          </a:solidFill>
+          <a:ln w="28575">
+            <a:solidFill>
+              <a:srgbClr val="2F7D1F"/>
+            </a:solidFill>
+          </a:ln>
+        </p:spPr>
+        <p:txBody>
+          <a:bodyPr anchor="t" rtlCol="false" tIns="270000" lIns="270000" bIns="270000" rIns="270000">
+            <a:normAutofit/>
+          </a:bodyPr>
+          <a:lstStyle/>
+          <a:p>
+            <a:pPr algn="l">
+              <a:lnSpc>
+                <a:spcPct val="110000"/>
+              </a:lnSpc>
+              <a:spcAft>
+                <a:spcPts val="900"/>
+              </a:spcAft>
+            </a:pPr>
+            <a:r>
+              <a:rPr lang="en-US" sz="3400" b="true">
+                <a:solidFill>
+                  <a:srgbClr val="5EE33A"/>
+                </a:solidFill>
+                <a:latin typeface="Space Mono Bold"/>
+                <a:ea typeface="Space Mono Bold"/>
+                <a:cs typeface="Space Mono Bold"/>
+                <a:sym typeface="Space Mono Bold"/>
+              </a:rPr>
+              <a:t>Why is it fast?</a:t>
+            </a:r>
+          </a:p>
+          <a:p>
+            <a:pPr algn="l">
+              <a:lnSpc>
+                <a:spcPct val="110000"/>
+              </a:lnSpc>
+              <a:spcAft>
+                <a:spcPts val="600"/>
+              </a:spcAft>
+            </a:pPr>
+            <a:r>
+              <a:rPr lang="en-US" sz="2800">
+                <a:solidFill>
+                  <a:srgbClr val="D9FBC8"/>
+                </a:solidFill>
+                <a:latin typeface="Space Mono"/>
+                <a:ea typeface="Space Mono"/>
+                <a:cs typeface="Space Mono"/>
+                <a:sym typeface="Space Mono"/>
+              </a:rPr>
+              <a:t>It is much faster than a storage drive (HDD or SSD), so the CPU does not wait for the disk.</a:t>
+            </a:r>
+          </a:p>
+        </p:txBody>
+      </p:sp>
+      <p:sp>
+        <p:nvSpPr>
+          <p:cNvPr name="Card 115" id="115"/>
+          <p:cNvSpPr txBox="true"/>
+          <p:nvPr/>
+        </p:nvSpPr>
+        <p:spPr>
+          <a:xfrm>
+            <a:off x="9318981" y="6350000"/>
+            <a:ext cx="7749781" cy="2900000"/>
+          </a:xfrm>
+          <a:prstGeom prst="roundRect">
+            <a:avLst>
+              <a:gd name="adj" fmla="val 4000"/>
+            </a:avLst>
+          </a:prstGeom>
+          <a:solidFill>
+            <a:srgbClr val="0C2810"/>
+          </a:solidFill>
+          <a:ln w="28575">
+            <a:solidFill>
+              <a:srgbClr val="2F7D1F"/>
+            </a:solidFill>
+          </a:ln>
+        </p:spPr>
+        <p:txBody>
+          <a:bodyPr anchor="t" rtlCol="false" tIns="270000" lIns="270000" bIns="270000" rIns="270000">
+            <a:normAutofit/>
+          </a:bodyPr>
+          <a:lstStyle/>
+          <a:p>
+            <a:pPr algn="l">
+              <a:lnSpc>
+                <a:spcPct val="110000"/>
+              </a:lnSpc>
+              <a:spcAft>
+                <a:spcPts val="900"/>
+              </a:spcAft>
+            </a:pPr>
+            <a:r>
+              <a:rPr lang="en-US" sz="3400" b="true">
+                <a:solidFill>
+                  <a:srgbClr val="5EE33A"/>
+                </a:solidFill>
+                <a:latin typeface="Space Mono Bold"/>
+                <a:ea typeface="Space Mono Bold"/>
+                <a:cs typeface="Space Mono Bold"/>
+                <a:sym typeface="Space Mono Bold"/>
+              </a:rPr>
+              <a:t>Why more RAM?</a:t>
+            </a:r>
+          </a:p>
+          <a:p>
+            <a:pPr algn="l">
+              <a:lnSpc>
+                <a:spcPct val="110000"/>
+              </a:lnSpc>
+              <a:spcAft>
+                <a:spcPts val="600"/>
+              </a:spcAft>
+            </a:pPr>
+            <a:r>
+              <a:rPr lang="en-US" sz="2800">
+                <a:solidFill>
+                  <a:srgbClr val="D9FBC8"/>
+                </a:solidFill>
+                <a:latin typeface="Space Mono"/>
+                <a:ea typeface="Space Mono"/>
+                <a:cs typeface="Space Mono"/>
+                <a:sym typeface="Space Mono"/>
+              </a:rPr>
+              <a:t>The more RAM a computer has, the more programs it can run at the same time.</a:t>
+            </a:r>
+          </a:p>
+        </p:txBody>
+      </p:sp>
+    </p:spTree>
+  </p:cSld>
+  <p:clrMapOvr>
+    <a:masterClrMapping/>
+  </p:clrMapOvr>
+  <p:transition spd="slow">
+    <p:push dir="l"/>
+  </p:transition>
+</p:sld>
+</file>
+
+<file path=ppt/slides/slide12.xml><?xml version="1.0" encoding="utf-8"?>
+<p:sld xmlns:p="http://schemas.openxmlformats.org/presentationml/2006/main" xmlns:a="http://schemas.openxmlformats.org/drawingml/2006/main" xmlns:r="http://schemas.openxmlformats.org/officeDocument/2006/relationships">
+  <p:cSld>
+    <p:bg>
+      <p:bgPr>
+        <a:solidFill>
+          <a:srgbClr val="06140A"/>
+        </a:solidFill>
+      </p:bgPr>
+    </p:bg>
+    <p:spTree>
+      <p:nvGrpSpPr>
+        <p:cNvPr id="1" name=""/>
+        <p:cNvGrpSpPr/>
+        <p:nvPr/>
+      </p:nvGrpSpPr>
+      <p:grpSpPr>
+        <a:xfrm>
+          <a:off x="0" y="0"/>
+          <a:ext cx="0" cy="0"/>
+          <a:chOff x="0" y="0"/>
+          <a:chExt cx="0" cy="0"/>
+        </a:xfrm>
+      </p:grpSpPr>
+      <p:grpSp>
+        <p:nvGrpSpPr>
+          <p:cNvPr name="Group 2" id="2"/>
+          <p:cNvGrpSpPr/>
+          <p:nvPr/>
+        </p:nvGrpSpPr>
+        <p:grpSpPr>
+          <a:xfrm rot="0">
+            <a:off x="-9525" y="371475"/>
+            <a:ext cx="18306593" cy="57150"/>
+            <a:chOff x="0" y="0"/>
+            <a:chExt cx="24408790" cy="76200"/>
+          </a:xfrm>
+        </p:grpSpPr>
+        <p:sp>
+          <p:nvSpPr>
+            <p:cNvPr name="Freeform 3" id="3"/>
+            <p:cNvSpPr/>
+            <p:nvPr/>
+          </p:nvSpPr>
+          <p:spPr>
+            <a:xfrm flipH="false" flipV="false" rot="0">
+              <a:off x="0" y="0"/>
+              <a:ext cx="24408764" cy="76200"/>
+            </a:xfrm>
+            <a:custGeom>
+              <a:avLst/>
+              <a:gdLst/>
+              <a:ahLst/>
+              <a:cxnLst/>
+              <a:rect r="r" b="b" t="t" l="l"/>
+              <a:pathLst>
+                <a:path h="76200" w="24408764">
+                  <a:moveTo>
+                    <a:pt x="0" y="0"/>
+                  </a:moveTo>
+                  <a:lnTo>
+                    <a:pt x="24408764" y="0"/>
+                  </a:lnTo>
+                  <a:lnTo>
+                    <a:pt x="24408764" y="76200"/>
+                  </a:lnTo>
+                  <a:lnTo>
+                    <a:pt x="0" y="76200"/>
+                  </a:lnTo>
+                  <a:close/>
+                </a:path>
+              </a:pathLst>
+            </a:custGeom>
+            <a:solidFill>
+              <a:srgbClr val="5EE33A"/>
+            </a:solidFill>
+            <a:ln w="19050" cap="sq">
+              <a:solidFill>
+                <a:srgbClr val="5EE33A"/>
+              </a:solidFill>
+              <a:prstDash val="solid"/>
+              <a:miter/>
+            </a:ln>
+          </p:spPr>
+        </p:sp>
+      </p:grpSp>
+      <p:grpSp>
+        <p:nvGrpSpPr>
+          <p:cNvPr name="Group 4" id="4"/>
+          <p:cNvGrpSpPr/>
+          <p:nvPr/>
+        </p:nvGrpSpPr>
+        <p:grpSpPr>
+          <a:xfrm rot="0">
+            <a:off x="-9525" y="9858346"/>
+            <a:ext cx="18306593" cy="57150"/>
+            <a:chOff x="0" y="0"/>
+            <a:chExt cx="24408790" cy="76200"/>
+          </a:xfrm>
+        </p:grpSpPr>
+        <p:sp>
+          <p:nvSpPr>
+            <p:cNvPr name="Freeform 5" id="5"/>
+            <p:cNvSpPr/>
+            <p:nvPr/>
+          </p:nvSpPr>
+          <p:spPr>
+            <a:xfrm flipH="false" flipV="false" rot="0">
+              <a:off x="0" y="0"/>
+              <a:ext cx="24408764" cy="76200"/>
+            </a:xfrm>
+            <a:custGeom>
+              <a:avLst/>
+              <a:gdLst/>
+              <a:ahLst/>
+              <a:cxnLst/>
+              <a:rect r="r" b="b" t="t" l="l"/>
+              <a:pathLst>
+                <a:path h="76200" w="24408764">
+                  <a:moveTo>
+                    <a:pt x="0" y="0"/>
+                  </a:moveTo>
+                  <a:lnTo>
+                    <a:pt x="24408764" y="0"/>
+                  </a:lnTo>
+                  <a:lnTo>
+                    <a:pt x="24408764" y="76200"/>
+                  </a:lnTo>
+                  <a:lnTo>
+                    <a:pt x="0" y="76200"/>
+                  </a:lnTo>
+                  <a:close/>
+                </a:path>
+              </a:pathLst>
+            </a:custGeom>
+            <a:solidFill>
+              <a:srgbClr val="5EE33A"/>
+            </a:solidFill>
+            <a:ln w="19050" cap="sq">
+              <a:solidFill>
+                <a:srgbClr val="5EE33A"/>
+              </a:solidFill>
+              <a:prstDash val="solid"/>
+              <a:miter/>
+            </a:ln>
+          </p:spPr>
+        </p:sp>
+      </p:grpSp>
+      <p:sp>
+        <p:nvSpPr>
+          <p:cNvPr name="Title 116" id="116"/>
+          <p:cNvSpPr txBox="true"/>
+          <p:nvPr/>
+        </p:nvSpPr>
+        <p:spPr>
+          <a:xfrm>
+            <a:off x="1219200" y="1219200"/>
+            <a:ext cx="15849562" cy="900000"/>
+          </a:xfrm>
+          <a:prstGeom prst="rect">
+            <a:avLst/>
+          </a:prstGeom>
+          <a:noFill/>
+        </p:spPr>
+        <p:txBody>
+          <a:bodyPr anchor="t" rtlCol="false" tIns="0" lIns="0" bIns="0" rIns="0">
+            <a:normAutofit/>
+          </a:bodyPr>
+          <a:lstStyle/>
+          <a:p>
+            <a:pPr algn="l">
+              <a:lnSpc>
+                <a:spcPct val="110000"/>
+              </a:lnSpc>
+              <a:spcAft>
+                <a:spcPts val="0"/>
+              </a:spcAft>
+            </a:pPr>
+            <a:r>
+              <a:rPr lang="en-US" sz="4500" b="true">
+                <a:solidFill>
+                  <a:srgbClr val="5EE33A"/>
+                </a:solidFill>
+                <a:latin typeface="Space Mono Bold"/>
+                <a:ea typeface="Space Mono Bold"/>
+                <a:cs typeface="Space Mono Bold"/>
+                <a:sym typeface="Space Mono Bold"/>
+              </a:rPr>
+              <a:t>&gt;HOW RAM WORKS</a:t>
+            </a:r>
+          </a:p>
+        </p:txBody>
+      </p:sp>
+      <p:sp>
+        <p:nvSpPr>
+          <p:cNvPr name="Card 117" id="117"/>
+          <p:cNvSpPr txBox="true"/>
+          <p:nvPr/>
+        </p:nvSpPr>
+        <p:spPr>
+          <a:xfrm>
+            <a:off x="1219200" y="2500000"/>
+            <a:ext cx="7749781" cy="3300000"/>
+          </a:xfrm>
+          <a:prstGeom prst="roundRect">
+            <a:avLst>
+              <a:gd name="adj" fmla="val 4000"/>
+            </a:avLst>
+          </a:prstGeom>
+          <a:solidFill>
+            <a:srgbClr val="0C2810"/>
+          </a:solidFill>
+          <a:ln w="28575">
+            <a:solidFill>
+              <a:srgbClr val="2F7D1F"/>
+            </a:solidFill>
+          </a:ln>
+        </p:spPr>
+        <p:txBody>
+          <a:bodyPr anchor="t" rtlCol="false" tIns="270000" lIns="270000" bIns="270000" rIns="270000">
+            <a:normAutofit/>
+          </a:bodyPr>
+          <a:lstStyle/>
+          <a:p>
+            <a:pPr algn="l">
+              <a:lnSpc>
+                <a:spcPct val="110000"/>
+              </a:lnSpc>
+              <a:spcAft>
+                <a:spcPts val="900"/>
+              </a:spcAft>
+            </a:pPr>
+            <a:r>
+              <a:rPr lang="en-US" sz="3400" b="true">
+                <a:solidFill>
+                  <a:srgbClr val="5EE33A"/>
+                </a:solidFill>
+                <a:latin typeface="Space Mono Bold"/>
+                <a:ea typeface="Space Mono Bold"/>
+                <a:cs typeface="Space Mono Bold"/>
+                <a:sym typeface="Space Mono Bold"/>
+              </a:rPr>
+              <a:t>1. Open a program</a:t>
+            </a:r>
+          </a:p>
+          <a:p>
+            <a:pPr algn="l">
+              <a:lnSpc>
+                <a:spcPct val="110000"/>
+              </a:lnSpc>
+              <a:spcAft>
+                <a:spcPts val="600"/>
+              </a:spcAft>
+            </a:pPr>
+            <a:r>
+              <a:rPr lang="en-US" sz="2800">
+                <a:solidFill>
+                  <a:srgbClr val="D9FBC8"/>
+                </a:solidFill>
+                <a:latin typeface="Space Mono"/>
+                <a:ea typeface="Space Mono"/>
+                <a:cs typeface="Space Mono"/>
+                <a:sym typeface="Space Mono"/>
+              </a:rPr>
+              <a:t>The operating system copies it from the drive (slow, non-volatile) into RAM (fast, volatile).</a:t>
+            </a:r>
+          </a:p>
+        </p:txBody>
+      </p:sp>
+      <p:sp>
+        <p:nvSpPr>
+          <p:cNvPr name="Card 118" id="118"/>
+          <p:cNvSpPr txBox="true"/>
+          <p:nvPr/>
+        </p:nvSpPr>
+        <p:spPr>
+          <a:xfrm>
+            <a:off x="9318981" y="2500000"/>
+            <a:ext cx="7749781" cy="3300000"/>
+          </a:xfrm>
+          <a:prstGeom prst="roundRect">
+            <a:avLst>
+              <a:gd name="adj" fmla="val 4000"/>
+            </a:avLst>
+          </a:prstGeom>
+          <a:solidFill>
+            <a:srgbClr val="0C2810"/>
+          </a:solidFill>
+          <a:ln w="28575">
+            <a:solidFill>
+              <a:srgbClr val="2F7D1F"/>
+            </a:solidFill>
+          </a:ln>
+        </p:spPr>
+        <p:txBody>
+          <a:bodyPr anchor="t" rtlCol="false" tIns="270000" lIns="270000" bIns="270000" rIns="270000">
+            <a:normAutofit/>
+          </a:bodyPr>
+          <a:lstStyle/>
+          <a:p>
+            <a:pPr algn="l">
+              <a:lnSpc>
+                <a:spcPct val="110000"/>
+              </a:lnSpc>
+              <a:spcAft>
+                <a:spcPts val="900"/>
+              </a:spcAft>
+            </a:pPr>
+            <a:r>
+              <a:rPr lang="en-US" sz="3400" b="true">
+                <a:solidFill>
+                  <a:srgbClr val="5EE33A"/>
+                </a:solidFill>
+                <a:latin typeface="Space Mono Bold"/>
+                <a:ea typeface="Space Mono Bold"/>
+                <a:cs typeface="Space Mono Bold"/>
+                <a:sym typeface="Space Mono Bold"/>
+              </a:rPr>
+              <a:t>2. Work</a:t>
+            </a:r>
+          </a:p>
+          <a:p>
+            <a:pPr algn="l">
+              <a:lnSpc>
+                <a:spcPct val="110000"/>
+              </a:lnSpc>
+              <a:spcAft>
+                <a:spcPts val="600"/>
+              </a:spcAft>
+            </a:pPr>
+            <a:r>
+              <a:rPr lang="en-US" sz="2800">
+                <a:solidFill>
+                  <a:srgbClr val="D9FBC8"/>
+                </a:solidFill>
+                <a:latin typeface="Space Mono"/>
+                <a:ea typeface="Space Mono"/>
+                <a:cs typeface="Space Mono"/>
+                <a:sym typeface="Space Mono"/>
+              </a:rPr>
+              <a:t>The CPU reads instructions and data from RAM and writes the results back.</a:t>
+            </a:r>
+          </a:p>
+        </p:txBody>
+      </p:sp>
+      <p:sp>
+        <p:nvSpPr>
+          <p:cNvPr name="Card 119" id="119"/>
+          <p:cNvSpPr txBox="true"/>
+          <p:nvPr/>
+        </p:nvSpPr>
+        <p:spPr>
+          <a:xfrm>
+            <a:off x="1219200" y="6150000"/>
+            <a:ext cx="7749781" cy="3300000"/>
+          </a:xfrm>
+          <a:prstGeom prst="roundRect">
+            <a:avLst>
+              <a:gd name="adj" fmla="val 4000"/>
+            </a:avLst>
+          </a:prstGeom>
+          <a:solidFill>
+            <a:srgbClr val="0C2810"/>
+          </a:solidFill>
+          <a:ln w="28575">
+            <a:solidFill>
+              <a:srgbClr val="2F7D1F"/>
+            </a:solidFill>
+          </a:ln>
+        </p:spPr>
+        <p:txBody>
+          <a:bodyPr anchor="t" rtlCol="false" tIns="270000" lIns="270000" bIns="270000" rIns="270000">
+            <a:normAutofit/>
+          </a:bodyPr>
+          <a:lstStyle/>
+          <a:p>
+            <a:pPr algn="l">
+              <a:lnSpc>
+                <a:spcPct val="110000"/>
+              </a:lnSpc>
+              <a:spcAft>
+                <a:spcPts val="900"/>
+              </a:spcAft>
+            </a:pPr>
+            <a:r>
+              <a:rPr lang="en-US" sz="3400" b="true">
+                <a:solidFill>
+                  <a:srgbClr val="5EE33A"/>
+                </a:solidFill>
+                <a:latin typeface="Space Mono Bold"/>
+                <a:ea typeface="Space Mono Bold"/>
+                <a:cs typeface="Space Mono Bold"/>
+                <a:sym typeface="Space Mono Bold"/>
+              </a:rPr>
+              <a:t>3. Close or turn off</a:t>
+            </a:r>
+          </a:p>
+          <a:p>
+            <a:pPr algn="l">
+              <a:lnSpc>
+                <a:spcPct val="110000"/>
+              </a:lnSpc>
+              <a:spcAft>
+                <a:spcPts val="600"/>
+              </a:spcAft>
+            </a:pPr>
+            <a:r>
+              <a:rPr lang="en-US" sz="2800">
+                <a:solidFill>
+                  <a:srgbClr val="D9FBC8"/>
+                </a:solidFill>
+                <a:latin typeface="Space Mono"/>
+                <a:ea typeface="Space Mono"/>
+                <a:cs typeface="Space Mono"/>
+                <a:sym typeface="Space Mono"/>
+              </a:rPr>
+              <a:t>When you close the program or turn off the computer, the RAM is cleared.</a:t>
+            </a:r>
+          </a:p>
+        </p:txBody>
+      </p:sp>
+      <p:sp>
+        <p:nvSpPr>
+          <p:cNvPr name="Card 120" id="120"/>
+          <p:cNvSpPr txBox="true"/>
+          <p:nvPr/>
+        </p:nvSpPr>
+        <p:spPr>
+          <a:xfrm>
+            <a:off x="9318981" y="6150000"/>
+            <a:ext cx="7749781" cy="3300000"/>
+          </a:xfrm>
+          <a:prstGeom prst="roundRect">
+            <a:avLst>
+              <a:gd name="adj" fmla="val 4000"/>
+            </a:avLst>
+          </a:prstGeom>
+          <a:solidFill>
+            <a:srgbClr val="0C2810"/>
+          </a:solidFill>
+          <a:ln w="28575">
+            <a:solidFill>
+              <a:srgbClr val="2F7D1F"/>
+            </a:solidFill>
+          </a:ln>
+        </p:spPr>
+        <p:txBody>
+          <a:bodyPr anchor="t" rtlCol="false" tIns="270000" lIns="270000" bIns="270000" rIns="270000">
+            <a:normAutofit/>
+          </a:bodyPr>
+          <a:lstStyle/>
+          <a:p>
+            <a:pPr algn="l">
+              <a:lnSpc>
+                <a:spcPct val="110000"/>
+              </a:lnSpc>
+              <a:spcAft>
+                <a:spcPts val="900"/>
+              </a:spcAft>
+            </a:pPr>
+            <a:r>
+              <a:rPr lang="en-US" sz="3400" b="true">
+                <a:solidFill>
+                  <a:srgbClr val="5EE33A"/>
+                </a:solidFill>
+                <a:latin typeface="Space Mono Bold"/>
+                <a:ea typeface="Space Mono Bold"/>
+                <a:cs typeface="Space Mono Bold"/>
+                <a:sym typeface="Space Mono Bold"/>
+              </a:rPr>
+              <a:t>4. Not enough RAM?</a:t>
+            </a:r>
+          </a:p>
+          <a:p>
+            <a:pPr algn="l">
+              <a:lnSpc>
+                <a:spcPct val="110000"/>
+              </a:lnSpc>
+              <a:spcAft>
+                <a:spcPts val="600"/>
+              </a:spcAft>
+            </a:pPr>
+            <a:r>
+              <a:rPr lang="en-US" sz="2800">
+                <a:solidFill>
+                  <a:srgbClr val="D9FBC8"/>
+                </a:solidFill>
+                <a:latin typeface="Space Mono"/>
+                <a:ea typeface="Space Mono"/>
+                <a:cs typeface="Space Mono"/>
+                <a:sym typeface="Space Mono"/>
+              </a:rPr>
+              <a:t>The system uses part of the drive as virtual memory, and the computer becomes much slower.</a:t>
+            </a:r>
+          </a:p>
+        </p:txBody>
+      </p:sp>
+    </p:spTree>
+  </p:cSld>
+  <p:clrMapOvr>
+    <a:masterClrMapping/>
+  </p:clrMapOvr>
+  <p:transition spd="slow">
+    <p:push dir="l"/>
+  </p:transition>
+</p:sld>
+</file>
+
+<file path=ppt/slides/slide13.xml><?xml version="1.0" encoding="utf-8"?>
+<p:sld xmlns:p="http://schemas.openxmlformats.org/presentationml/2006/main" xmlns:a="http://schemas.openxmlformats.org/drawingml/2006/main" xmlns:r="http://schemas.openxmlformats.org/officeDocument/2006/relationships">
+  <p:cSld>
+    <p:bg>
+      <p:bgPr>
+        <a:solidFill>
+          <a:srgbClr val="06140A"/>
+        </a:solidFill>
+      </p:bgPr>
+    </p:bg>
+    <p:spTree>
+      <p:nvGrpSpPr>
+        <p:cNvPr id="1" name=""/>
+        <p:cNvGrpSpPr/>
+        <p:nvPr/>
+      </p:nvGrpSpPr>
+      <p:grpSpPr>
+        <a:xfrm>
+          <a:off x="0" y="0"/>
+          <a:ext cx="0" cy="0"/>
+          <a:chOff x="0" y="0"/>
+          <a:chExt cx="0" cy="0"/>
+        </a:xfrm>
+      </p:grpSpPr>
+      <p:grpSp>
+        <p:nvGrpSpPr>
+          <p:cNvPr name="Group 2" id="2"/>
+          <p:cNvGrpSpPr/>
+          <p:nvPr/>
+        </p:nvGrpSpPr>
+        <p:grpSpPr>
+          <a:xfrm rot="0">
+            <a:off x="-9525" y="371475"/>
+            <a:ext cx="18306593" cy="57150"/>
+            <a:chOff x="0" y="0"/>
+            <a:chExt cx="24408790" cy="76200"/>
+          </a:xfrm>
+        </p:grpSpPr>
+        <p:sp>
+          <p:nvSpPr>
+            <p:cNvPr name="Freeform 3" id="3"/>
+            <p:cNvSpPr/>
+            <p:nvPr/>
+          </p:nvSpPr>
+          <p:spPr>
+            <a:xfrm flipH="false" flipV="false" rot="0">
+              <a:off x="0" y="0"/>
+              <a:ext cx="24408764" cy="76200"/>
+            </a:xfrm>
+            <a:custGeom>
+              <a:avLst/>
+              <a:gdLst/>
+              <a:ahLst/>
+              <a:cxnLst/>
+              <a:rect r="r" b="b" t="t" l="l"/>
+              <a:pathLst>
+                <a:path h="76200" w="24408764">
+                  <a:moveTo>
+                    <a:pt x="0" y="0"/>
+                  </a:moveTo>
+                  <a:lnTo>
+                    <a:pt x="24408764" y="0"/>
+                  </a:lnTo>
+                  <a:lnTo>
+                    <a:pt x="24408764" y="76200"/>
+                  </a:lnTo>
+                  <a:lnTo>
+                    <a:pt x="0" y="76200"/>
+                  </a:lnTo>
+                  <a:close/>
+                </a:path>
+              </a:pathLst>
+            </a:custGeom>
+            <a:solidFill>
+              <a:srgbClr val="5EE33A"/>
+            </a:solidFill>
+            <a:ln w="19050" cap="sq">
+              <a:solidFill>
+                <a:srgbClr val="5EE33A"/>
+              </a:solidFill>
+              <a:prstDash val="solid"/>
+              <a:miter/>
+            </a:ln>
+          </p:spPr>
+        </p:sp>
+      </p:grpSp>
+      <p:grpSp>
+        <p:nvGrpSpPr>
+          <p:cNvPr name="Group 4" id="4"/>
+          <p:cNvGrpSpPr/>
+          <p:nvPr/>
+        </p:nvGrpSpPr>
+        <p:grpSpPr>
+          <a:xfrm rot="0">
+            <a:off x="-9525" y="9858346"/>
+            <a:ext cx="18306593" cy="57150"/>
+            <a:chOff x="0" y="0"/>
+            <a:chExt cx="24408790" cy="76200"/>
+          </a:xfrm>
+        </p:grpSpPr>
+        <p:sp>
+          <p:nvSpPr>
+            <p:cNvPr name="Freeform 5" id="5"/>
+            <p:cNvSpPr/>
+            <p:nvPr/>
+          </p:nvSpPr>
+          <p:spPr>
+            <a:xfrm flipH="false" flipV="false" rot="0">
+              <a:off x="0" y="0"/>
+              <a:ext cx="24408764" cy="76200"/>
+            </a:xfrm>
+            <a:custGeom>
+              <a:avLst/>
+              <a:gdLst/>
+              <a:ahLst/>
+              <a:cxnLst/>
+              <a:rect r="r" b="b" t="t" l="l"/>
+              <a:pathLst>
+                <a:path h="76200" w="24408764">
+                  <a:moveTo>
+                    <a:pt x="0" y="0"/>
+                  </a:moveTo>
+                  <a:lnTo>
+                    <a:pt x="24408764" y="0"/>
+                  </a:lnTo>
+                  <a:lnTo>
+                    <a:pt x="24408764" y="76200"/>
+                  </a:lnTo>
+                  <a:lnTo>
+                    <a:pt x="0" y="76200"/>
+                  </a:lnTo>
+                  <a:close/>
+                </a:path>
+              </a:pathLst>
+            </a:custGeom>
+            <a:solidFill>
+              <a:srgbClr val="5EE33A"/>
+            </a:solidFill>
+            <a:ln w="19050" cap="sq">
+              <a:solidFill>
+                <a:srgbClr val="5EE33A"/>
+              </a:solidFill>
+              <a:prstDash val="solid"/>
+              <a:miter/>
+            </a:ln>
+          </p:spPr>
+        </p:sp>
+      </p:grpSp>
+      <p:sp>
+        <p:nvSpPr>
+          <p:cNvPr name="Title 121" id="121"/>
+          <p:cNvSpPr txBox="true"/>
+          <p:nvPr/>
+        </p:nvSpPr>
+        <p:spPr>
+          <a:xfrm>
+            <a:off x="1219200" y="1219200"/>
+            <a:ext cx="15849562" cy="900000"/>
+          </a:xfrm>
+          <a:prstGeom prst="rect">
+            <a:avLst/>
+          </a:prstGeom>
+          <a:noFill/>
+        </p:spPr>
+        <p:txBody>
+          <a:bodyPr anchor="t" rtlCol="false" tIns="0" lIns="0" bIns="0" rIns="0">
+            <a:normAutofit/>
+          </a:bodyPr>
+          <a:lstStyle/>
+          <a:p>
+            <a:pPr algn="l">
+              <a:lnSpc>
+                <a:spcPct val="110000"/>
+              </a:lnSpc>
+              <a:spcAft>
+                <a:spcPts val="0"/>
+              </a:spcAft>
+            </a:pPr>
+            <a:r>
+              <a:rPr lang="en-US" sz="4500" b="true">
+                <a:solidFill>
+                  <a:srgbClr val="5EE33A"/>
+                </a:solidFill>
+                <a:latin typeface="Space Mono Bold"/>
+                <a:ea typeface="Space Mono Bold"/>
+                <a:cs typeface="Space Mono Bold"/>
+                <a:sym typeface="Space Mono Bold"/>
+              </a:rPr>
+              <a:t>&gt;CPU AND RAM</a:t>
+            </a:r>
+          </a:p>
+        </p:txBody>
+      </p:sp>
+      <p:sp>
+        <p:nvSpPr>
+          <p:cNvPr name="Subtitle 122" id="122"/>
+          <p:cNvSpPr txBox="true"/>
+          <p:nvPr/>
+        </p:nvSpPr>
+        <p:spPr>
+          <a:xfrm>
+            <a:off x="1219200" y="2219315"/>
+            <a:ext cx="15849562" cy="700000"/>
+          </a:xfrm>
+          <a:prstGeom prst="rect">
+            <a:avLst/>
+          </a:prstGeom>
+          <a:noFill/>
+        </p:spPr>
+        <p:txBody>
+          <a:bodyPr anchor="t" rtlCol="false" tIns="0" lIns="0" bIns="0" rIns="0">
+            <a:normAutofit/>
+          </a:bodyPr>
+          <a:lstStyle/>
+          <a:p>
+            <a:pPr algn="l">
+              <a:lnSpc>
+                <a:spcPct val="110000"/>
+              </a:lnSpc>
+              <a:spcAft>
+                <a:spcPts val="0"/>
+              </a:spcAft>
+            </a:pPr>
+            <a:r>
+              <a:rPr lang="en-US" sz="2100">
+                <a:solidFill>
+                  <a:srgbClr val="FACC15"/>
+                </a:solidFill>
+                <a:latin typeface="Space Mono"/>
+                <a:ea typeface="Space Mono"/>
+                <a:cs typeface="Space Mono"/>
+                <a:sym typeface="Space Mono"/>
+              </a:rPr>
+              <a:t>The CPU talks to RAM through the memory controller, which is inside the processor. So the CPU decides which memory the computer can use.</a:t>
+            </a:r>
+          </a:p>
+        </p:txBody>
+      </p:sp>
+      <p:sp>
+        <p:nvSpPr>
+          <p:cNvPr name="Card 123" id="123"/>
+          <p:cNvSpPr txBox="true"/>
+          <p:nvPr/>
+        </p:nvSpPr>
+        <p:spPr>
+          <a:xfrm>
+            <a:off x="1219200" y="3700000"/>
+            <a:ext cx="5049854" cy="5300000"/>
+          </a:xfrm>
+          <a:prstGeom prst="roundRect">
+            <a:avLst>
+              <a:gd name="adj" fmla="val 4000"/>
+            </a:avLst>
+          </a:prstGeom>
+          <a:solidFill>
+            <a:srgbClr val="0C2810"/>
+          </a:solidFill>
+          <a:ln w="28575">
+            <a:solidFill>
+              <a:srgbClr val="2F7D1F"/>
+            </a:solidFill>
+          </a:ln>
+        </p:spPr>
+        <p:txBody>
+          <a:bodyPr anchor="t" rtlCol="false" tIns="270000" lIns="270000" bIns="270000" rIns="270000">
+            <a:normAutofit/>
+          </a:bodyPr>
+          <a:lstStyle/>
+          <a:p>
+            <a:pPr algn="l">
+              <a:lnSpc>
+                <a:spcPct val="110000"/>
+              </a:lnSpc>
+              <a:spcAft>
+                <a:spcPts val="900"/>
+              </a:spcAft>
+            </a:pPr>
+            <a:r>
+              <a:rPr lang="en-US" sz="3400" b="true">
+                <a:solidFill>
+                  <a:srgbClr val="5EE33A"/>
+                </a:solidFill>
+                <a:latin typeface="Space Mono Bold"/>
+                <a:ea typeface="Space Mono Bold"/>
+                <a:cs typeface="Space Mono Bold"/>
+                <a:sym typeface="Space Mono Bold"/>
+              </a:rPr>
+              <a:t>Memory type</a:t>
+            </a:r>
+          </a:p>
+          <a:p>
+            <a:pPr algn="l">
+              <a:lnSpc>
+                <a:spcPct val="110000"/>
+              </a:lnSpc>
+              <a:spcAft>
+                <a:spcPts val="600"/>
+              </a:spcAft>
+            </a:pPr>
+            <a:r>
+              <a:rPr lang="en-US" sz="2800">
+                <a:solidFill>
+                  <a:srgbClr val="D9FBC8"/>
+                </a:solidFill>
+                <a:latin typeface="Space Mono"/>
+                <a:ea typeface="Space Mono"/>
+                <a:cs typeface="Space Mono"/>
+                <a:sym typeface="Space Mono"/>
+              </a:rPr>
+              <a:t>A CPU can support DDR4, DDR5 or both, depending on the model.</a:t>
+            </a:r>
+          </a:p>
+        </p:txBody>
+      </p:sp>
+      <p:sp>
+        <p:nvSpPr>
+          <p:cNvPr name="Card 124" id="124"/>
+          <p:cNvSpPr txBox="true"/>
+          <p:nvPr/>
+        </p:nvSpPr>
+        <p:spPr>
+          <a:xfrm>
+            <a:off x="6619054" y="3700000"/>
+            <a:ext cx="5049854" cy="5300000"/>
+          </a:xfrm>
+          <a:prstGeom prst="roundRect">
+            <a:avLst>
+              <a:gd name="adj" fmla="val 4000"/>
+            </a:avLst>
+          </a:prstGeom>
+          <a:solidFill>
+            <a:srgbClr val="0C2810"/>
+          </a:solidFill>
+          <a:ln w="28575">
+            <a:solidFill>
+              <a:srgbClr val="2F7D1F"/>
+            </a:solidFill>
+          </a:ln>
+        </p:spPr>
+        <p:txBody>
+          <a:bodyPr anchor="t" rtlCol="false" tIns="270000" lIns="270000" bIns="270000" rIns="270000">
+            <a:normAutofit/>
+          </a:bodyPr>
+          <a:lstStyle/>
+          <a:p>
+            <a:pPr algn="l">
+              <a:lnSpc>
+                <a:spcPct val="110000"/>
+              </a:lnSpc>
+              <a:spcAft>
+                <a:spcPts val="900"/>
+              </a:spcAft>
+            </a:pPr>
+            <a:r>
+              <a:rPr lang="en-US" sz="3400" b="true">
+                <a:solidFill>
+                  <a:srgbClr val="5EE33A"/>
+                </a:solidFill>
+                <a:latin typeface="Space Mono Bold"/>
+                <a:ea typeface="Space Mono Bold"/>
+                <a:cs typeface="Space Mono Bold"/>
+                <a:sym typeface="Space Mono Bold"/>
+              </a:rPr>
+              <a:t>Speed and channels</a:t>
+            </a:r>
+          </a:p>
+          <a:p>
+            <a:pPr algn="l">
+              <a:lnSpc>
+                <a:spcPct val="110000"/>
+              </a:lnSpc>
+              <a:spcAft>
+                <a:spcPts val="600"/>
+              </a:spcAft>
+            </a:pPr>
+            <a:r>
+              <a:rPr lang="en-US" sz="2800">
+                <a:solidFill>
+                  <a:srgbClr val="D9FBC8"/>
+                </a:solidFill>
+                <a:latin typeface="Space Mono"/>
+                <a:ea typeface="Space Mono"/>
+                <a:cs typeface="Space Mono"/>
+                <a:sym typeface="Space Mono"/>
+              </a:rPr>
+              <a:t>Each CPU has a maximum memory speed and a number of channels it supports. Faster RAM works at higher speeds only with profiles like XMP or EXPO.</a:t>
+            </a:r>
+          </a:p>
+        </p:txBody>
+      </p:sp>
+      <p:sp>
+        <p:nvSpPr>
+          <p:cNvPr name="Card 125" id="125"/>
+          <p:cNvSpPr txBox="true"/>
+          <p:nvPr/>
+        </p:nvSpPr>
+        <p:spPr>
+          <a:xfrm>
+            <a:off x="12018908" y="3700000"/>
+            <a:ext cx="5049854" cy="5300000"/>
+          </a:xfrm>
+          <a:prstGeom prst="roundRect">
+            <a:avLst>
+              <a:gd name="adj" fmla="val 4000"/>
+            </a:avLst>
+          </a:prstGeom>
+          <a:solidFill>
+            <a:srgbClr val="0C2810"/>
+          </a:solidFill>
+          <a:ln w="28575">
+            <a:solidFill>
+              <a:srgbClr val="2F7D1F"/>
+            </a:solidFill>
+          </a:ln>
+        </p:spPr>
+        <p:txBody>
+          <a:bodyPr anchor="t" rtlCol="false" tIns="270000" lIns="270000" bIns="270000" rIns="270000">
+            <a:normAutofit/>
+          </a:bodyPr>
+          <a:lstStyle/>
+          <a:p>
+            <a:pPr algn="l">
+              <a:lnSpc>
+                <a:spcPct val="110000"/>
+              </a:lnSpc>
+              <a:spcAft>
+                <a:spcPts val="900"/>
+              </a:spcAft>
+            </a:pPr>
+            <a:r>
+              <a:rPr lang="en-US" sz="3400" b="true">
+                <a:solidFill>
+                  <a:srgbClr val="5EE33A"/>
+                </a:solidFill>
+                <a:latin typeface="Space Mono Bold"/>
+                <a:ea typeface="Space Mono Bold"/>
+                <a:cs typeface="Space Mono Bold"/>
+                <a:sym typeface="Space Mono Bold"/>
+              </a:rPr>
+              <a:t>Cache</a:t>
+            </a:r>
+          </a:p>
+          <a:p>
+            <a:pPr algn="l">
+              <a:lnSpc>
+                <a:spcPct val="110000"/>
+              </a:lnSpc>
+              <a:spcAft>
+                <a:spcPts val="600"/>
+              </a:spcAft>
+            </a:pPr>
+            <a:r>
+              <a:rPr lang="en-US" sz="2800">
+                <a:solidFill>
+                  <a:srgbClr val="D9FBC8"/>
+                </a:solidFill>
+                <a:latin typeface="Space Mono"/>
+                <a:ea typeface="Space Mono"/>
+                <a:cs typeface="Space Mono"/>
+                <a:sym typeface="Space Mono"/>
+              </a:rPr>
+              <a:t>The CPU keeps copies of the most used RAM data in its cache (L1, L2, L3), so it does not wait for RAM every time.</a:t>
+            </a:r>
+          </a:p>
+        </p:txBody>
+      </p:sp>
+    </p:spTree>
+  </p:cSld>
+  <p:clrMapOvr>
+    <a:masterClrMapping/>
+  </p:clrMapOvr>
+  <p:transition spd="slow">
+    <p:push dir="l"/>
+  </p:transition>
+</p:sld>
+</file>
+
+<file path=ppt/slides/slide14.xml><?xml version="1.0" encoding="utf-8"?>
+<p:sld xmlns:p="http://schemas.openxmlformats.org/presentationml/2006/main" xmlns:a="http://schemas.openxmlformats.org/drawingml/2006/main" xmlns:r="http://schemas.openxmlformats.org/officeDocument/2006/relationships">
+  <p:cSld>
+    <p:bg>
+      <p:bgPr>
+        <a:solidFill>
+          <a:srgbClr val="06140A"/>
+        </a:solidFill>
+      </p:bgPr>
+    </p:bg>
+    <p:spTree>
+      <p:nvGrpSpPr>
+        <p:cNvPr id="1" name=""/>
+        <p:cNvGrpSpPr/>
+        <p:nvPr/>
+      </p:nvGrpSpPr>
+      <p:grpSpPr>
+        <a:xfrm>
+          <a:off x="0" y="0"/>
+          <a:ext cx="0" cy="0"/>
+          <a:chOff x="0" y="0"/>
+          <a:chExt cx="0" cy="0"/>
+        </a:xfrm>
+      </p:grpSpPr>
+      <p:grpSp>
+        <p:nvGrpSpPr>
+          <p:cNvPr name="Group 2" id="2"/>
+          <p:cNvGrpSpPr/>
+          <p:nvPr/>
+        </p:nvGrpSpPr>
+        <p:grpSpPr>
+          <a:xfrm rot="0">
+            <a:off x="-9525" y="371475"/>
+            <a:ext cx="18306593" cy="57150"/>
+            <a:chOff x="0" y="0"/>
+            <a:chExt cx="24408790" cy="76200"/>
+          </a:xfrm>
+        </p:grpSpPr>
+        <p:sp>
+          <p:nvSpPr>
+            <p:cNvPr name="Freeform 3" id="3"/>
+            <p:cNvSpPr/>
+            <p:nvPr/>
+          </p:nvSpPr>
+          <p:spPr>
+            <a:xfrm flipH="false" flipV="false" rot="0">
+              <a:off x="0" y="0"/>
+              <a:ext cx="24408764" cy="76200"/>
+            </a:xfrm>
+            <a:custGeom>
+              <a:avLst/>
+              <a:gdLst/>
+              <a:ahLst/>
+              <a:cxnLst/>
+              <a:rect r="r" b="b" t="t" l="l"/>
+              <a:pathLst>
+                <a:path h="76200" w="24408764">
+                  <a:moveTo>
+                    <a:pt x="0" y="0"/>
+                  </a:moveTo>
+                  <a:lnTo>
+                    <a:pt x="24408764" y="0"/>
+                  </a:lnTo>
+                  <a:lnTo>
+                    <a:pt x="24408764" y="76200"/>
+                  </a:lnTo>
+                  <a:lnTo>
+                    <a:pt x="0" y="76200"/>
+                  </a:lnTo>
+                  <a:close/>
+                </a:path>
+              </a:pathLst>
+            </a:custGeom>
+            <a:solidFill>
+              <a:srgbClr val="5EE33A"/>
+            </a:solidFill>
+            <a:ln w="19050" cap="sq">
+              <a:solidFill>
+                <a:srgbClr val="5EE33A"/>
+              </a:solidFill>
+              <a:prstDash val="solid"/>
+              <a:miter/>
+            </a:ln>
+          </p:spPr>
+        </p:sp>
+      </p:grpSp>
+      <p:grpSp>
+        <p:nvGrpSpPr>
+          <p:cNvPr name="Group 4" id="4"/>
+          <p:cNvGrpSpPr/>
+          <p:nvPr/>
+        </p:nvGrpSpPr>
+        <p:grpSpPr>
+          <a:xfrm rot="0">
+            <a:off x="-9525" y="9858346"/>
+            <a:ext cx="18306593" cy="57150"/>
+            <a:chOff x="0" y="0"/>
+            <a:chExt cx="24408790" cy="76200"/>
+          </a:xfrm>
+        </p:grpSpPr>
+        <p:sp>
+          <p:nvSpPr>
+            <p:cNvPr name="Freeform 5" id="5"/>
+            <p:cNvSpPr/>
+            <p:nvPr/>
+          </p:nvSpPr>
+          <p:spPr>
+            <a:xfrm flipH="false" flipV="false" rot="0">
+              <a:off x="0" y="0"/>
+              <a:ext cx="24408764" cy="76200"/>
+            </a:xfrm>
+            <a:custGeom>
+              <a:avLst/>
+              <a:gdLst/>
+              <a:ahLst/>
+              <a:cxnLst/>
+              <a:rect r="r" b="b" t="t" l="l"/>
+              <a:pathLst>
+                <a:path h="76200" w="24408764">
+                  <a:moveTo>
+                    <a:pt x="0" y="0"/>
+                  </a:moveTo>
+                  <a:lnTo>
+                    <a:pt x="24408764" y="0"/>
+                  </a:lnTo>
+                  <a:lnTo>
+                    <a:pt x="24408764" y="76200"/>
+                  </a:lnTo>
+                  <a:lnTo>
+                    <a:pt x="0" y="76200"/>
+                  </a:lnTo>
+                  <a:close/>
+                </a:path>
+              </a:pathLst>
+            </a:custGeom>
+            <a:solidFill>
+              <a:srgbClr val="5EE33A"/>
+            </a:solidFill>
+            <a:ln w="19050" cap="sq">
+              <a:solidFill>
+                <a:srgbClr val="5EE33A"/>
+              </a:solidFill>
+              <a:prstDash val="solid"/>
+              <a:miter/>
+            </a:ln>
+          </p:spPr>
+        </p:sp>
+      </p:grpSp>
+      <p:sp>
+        <p:nvSpPr>
+          <p:cNvPr name="Title 126" id="126"/>
+          <p:cNvSpPr txBox="true"/>
+          <p:nvPr/>
+        </p:nvSpPr>
+        <p:spPr>
+          <a:xfrm>
+            <a:off x="1219200" y="1219200"/>
+            <a:ext cx="15849562" cy="900000"/>
+          </a:xfrm>
+          <a:prstGeom prst="rect">
+            <a:avLst/>
+          </a:prstGeom>
+          <a:noFill/>
+        </p:spPr>
+        <p:txBody>
+          <a:bodyPr anchor="t" rtlCol="false" tIns="0" lIns="0" bIns="0" rIns="0">
+            <a:normAutofit/>
+          </a:bodyPr>
+          <a:lstStyle/>
+          <a:p>
+            <a:pPr algn="l">
+              <a:lnSpc>
+                <a:spcPct val="110000"/>
+              </a:lnSpc>
+              <a:spcAft>
+                <a:spcPts val="0"/>
+              </a:spcAft>
+            </a:pPr>
+            <a:r>
+              <a:rPr lang="en-US" sz="4500" b="true">
+                <a:solidFill>
+                  <a:srgbClr val="5EE33A"/>
+                </a:solidFill>
+                <a:latin typeface="Space Mono Bold"/>
+                <a:ea typeface="Space Mono Bold"/>
+                <a:cs typeface="Space Mono Bold"/>
+                <a:sym typeface="Space Mono Bold"/>
+              </a:rPr>
+              <a:t>&gt;MOTHERBOARD AND RAM</a:t>
+            </a:r>
+          </a:p>
+        </p:txBody>
+      </p:sp>
+      <p:sp>
+        <p:nvSpPr>
+          <p:cNvPr name="Subtitle 127" id="127"/>
+          <p:cNvSpPr txBox="true"/>
+          <p:nvPr/>
+        </p:nvSpPr>
+        <p:spPr>
+          <a:xfrm>
+            <a:off x="1219200" y="2219315"/>
+            <a:ext cx="15849562" cy="700000"/>
+          </a:xfrm>
+          <a:prstGeom prst="rect">
+            <a:avLst/>
+          </a:prstGeom>
+          <a:noFill/>
+        </p:spPr>
+        <p:txBody>
+          <a:bodyPr anchor="t" rtlCol="false" tIns="0" lIns="0" bIns="0" rIns="0">
+            <a:normAutofit/>
+          </a:bodyPr>
+          <a:lstStyle/>
+          <a:p>
+            <a:pPr algn="l">
+              <a:lnSpc>
+                <a:spcPct val="110000"/>
+              </a:lnSpc>
+              <a:spcAft>
+                <a:spcPts val="0"/>
+              </a:spcAft>
+            </a:pPr>
+            <a:r>
+              <a:rPr lang="en-US" sz="2100">
+                <a:solidFill>
+                  <a:srgbClr val="FACC15"/>
+                </a:solidFill>
+                <a:latin typeface="Space Mono"/>
+                <a:ea typeface="Space Mono"/>
+                <a:cs typeface="Space Mono"/>
+                <a:sym typeface="Space Mono"/>
+              </a:rPr>
+              <a:t>RAM modules go in the DIMM slots of the motherboard, so both must be compatible.</a:t>
+            </a:r>
+          </a:p>
+        </p:txBody>
+      </p:sp>
+      <p:sp>
+        <p:nvSpPr>
+          <p:cNvPr name="Card 128" id="128"/>
+          <p:cNvSpPr txBox="true"/>
+          <p:nvPr/>
+        </p:nvSpPr>
+        <p:spPr>
+          <a:xfrm>
+            <a:off x="1219200" y="3200000"/>
+            <a:ext cx="7749781" cy="2850000"/>
+          </a:xfrm>
+          <a:prstGeom prst="roundRect">
+            <a:avLst>
+              <a:gd name="adj" fmla="val 4000"/>
+            </a:avLst>
+          </a:prstGeom>
+          <a:solidFill>
+            <a:srgbClr val="0C2810"/>
+          </a:solidFill>
+          <a:ln w="28575">
+            <a:solidFill>
+              <a:srgbClr val="2F7D1F"/>
+            </a:solidFill>
+          </a:ln>
+        </p:spPr>
+        <p:txBody>
+          <a:bodyPr anchor="t" rtlCol="false" tIns="270000" lIns="270000" bIns="270000" rIns="270000">
+            <a:normAutofit/>
+          </a:bodyPr>
+          <a:lstStyle/>
+          <a:p>
+            <a:pPr algn="l">
+              <a:lnSpc>
+                <a:spcPct val="110000"/>
+              </a:lnSpc>
+              <a:spcAft>
+                <a:spcPts val="900"/>
+              </a:spcAft>
+            </a:pPr>
+            <a:r>
+              <a:rPr lang="en-US" sz="3400" b="true">
+                <a:solidFill>
+                  <a:srgbClr val="5EE33A"/>
+                </a:solidFill>
+                <a:latin typeface="Space Mono Bold"/>
+                <a:ea typeface="Space Mono Bold"/>
+                <a:cs typeface="Space Mono Bold"/>
+                <a:sym typeface="Space Mono Bold"/>
+              </a:rPr>
+              <a:t>DDR generation</a:t>
+            </a:r>
+          </a:p>
+          <a:p>
+            <a:pPr algn="l">
+              <a:lnSpc>
+                <a:spcPct val="110000"/>
+              </a:lnSpc>
+              <a:spcAft>
+                <a:spcPts val="600"/>
+              </a:spcAft>
+            </a:pPr>
+            <a:r>
+              <a:rPr lang="en-US" sz="2400">
+                <a:solidFill>
+                  <a:srgbClr val="D9FBC8"/>
+                </a:solidFill>
+                <a:latin typeface="Space Mono"/>
+                <a:ea typeface="Space Mono"/>
+                <a:cs typeface="Space Mono"/>
+                <a:sym typeface="Space Mono"/>
+              </a:rPr>
+              <a:t>A DDR4 module does not fit in a DDR5 slot because the notch is in a different position. Buy RAM of the same generation as the motherboard.</a:t>
+            </a:r>
+          </a:p>
+        </p:txBody>
+      </p:sp>
+      <p:sp>
+        <p:nvSpPr>
+          <p:cNvPr name="Card 129" id="129"/>
+          <p:cNvSpPr txBox="true"/>
+          <p:nvPr/>
+        </p:nvSpPr>
+        <p:spPr>
+          <a:xfrm>
+            <a:off x="9318981" y="3200000"/>
+            <a:ext cx="7749781" cy="2850000"/>
+          </a:xfrm>
+          <a:prstGeom prst="roundRect">
+            <a:avLst>
+              <a:gd name="adj" fmla="val 4000"/>
+            </a:avLst>
+          </a:prstGeom>
+          <a:solidFill>
+            <a:srgbClr val="0C2810"/>
+          </a:solidFill>
+          <a:ln w="28575">
+            <a:solidFill>
+              <a:srgbClr val="2F7D1F"/>
+            </a:solidFill>
+          </a:ln>
+        </p:spPr>
+        <p:txBody>
+          <a:bodyPr anchor="t" rtlCol="false" tIns="270000" lIns="270000" bIns="270000" rIns="270000">
+            <a:normAutofit/>
+          </a:bodyPr>
+          <a:lstStyle/>
+          <a:p>
+            <a:pPr algn="l">
+              <a:lnSpc>
+                <a:spcPct val="110000"/>
+              </a:lnSpc>
+              <a:spcAft>
+                <a:spcPts val="900"/>
+              </a:spcAft>
+            </a:pPr>
+            <a:r>
+              <a:rPr lang="en-US" sz="3400" b="true">
+                <a:solidFill>
+                  <a:srgbClr val="5EE33A"/>
+                </a:solidFill>
+                <a:latin typeface="Space Mono Bold"/>
+                <a:ea typeface="Space Mono Bold"/>
+                <a:cs typeface="Space Mono Bold"/>
+                <a:sym typeface="Space Mono Bold"/>
+              </a:rPr>
+              <a:t>Number of slots</a:t>
+            </a:r>
+          </a:p>
+          <a:p>
+            <a:pPr algn="l">
+              <a:lnSpc>
+                <a:spcPct val="110000"/>
+              </a:lnSpc>
+              <a:spcAft>
+                <a:spcPts val="600"/>
+              </a:spcAft>
+            </a:pPr>
+            <a:r>
+              <a:rPr lang="en-US" sz="2400">
+                <a:solidFill>
+                  <a:srgbClr val="D9FBC8"/>
+                </a:solidFill>
+                <a:latin typeface="Space Mono"/>
+                <a:ea typeface="Space Mono"/>
+                <a:cs typeface="Space Mono"/>
+                <a:sym typeface="Space Mono"/>
+              </a:rPr>
+              <a:t>Motherboards usually have 2 or 4 slots. Each one has a maximum total capacity.</a:t>
+            </a:r>
+          </a:p>
+        </p:txBody>
+      </p:sp>
+      <p:sp>
+        <p:nvSpPr>
+          <p:cNvPr name="Card 130" id="130"/>
+          <p:cNvSpPr txBox="true"/>
+          <p:nvPr/>
+        </p:nvSpPr>
+        <p:spPr>
+          <a:xfrm>
+            <a:off x="1219200" y="6400000"/>
+            <a:ext cx="7749781" cy="2850000"/>
+          </a:xfrm>
+          <a:prstGeom prst="roundRect">
+            <a:avLst>
+              <a:gd name="adj" fmla="val 4000"/>
+            </a:avLst>
+          </a:prstGeom>
+          <a:solidFill>
+            <a:srgbClr val="0C2810"/>
+          </a:solidFill>
+          <a:ln w="28575">
+            <a:solidFill>
+              <a:srgbClr val="2F7D1F"/>
+            </a:solidFill>
+          </a:ln>
+        </p:spPr>
+        <p:txBody>
+          <a:bodyPr anchor="t" rtlCol="false" tIns="270000" lIns="270000" bIns="270000" rIns="270000">
+            <a:normAutofit/>
+          </a:bodyPr>
+          <a:lstStyle/>
+          <a:p>
+            <a:pPr algn="l">
+              <a:lnSpc>
+                <a:spcPct val="110000"/>
+              </a:lnSpc>
+              <a:spcAft>
+                <a:spcPts val="900"/>
+              </a:spcAft>
+            </a:pPr>
+            <a:r>
+              <a:rPr lang="en-US" sz="3400" b="true">
+                <a:solidFill>
+                  <a:srgbClr val="5EE33A"/>
+                </a:solidFill>
+                <a:latin typeface="Space Mono Bold"/>
+                <a:ea typeface="Space Mono Bold"/>
+                <a:cs typeface="Space Mono Bold"/>
+                <a:sym typeface="Space Mono Bold"/>
+              </a:rPr>
+              <a:t>Dual channel</a:t>
+            </a:r>
+          </a:p>
+          <a:p>
+            <a:pPr algn="l">
+              <a:lnSpc>
+                <a:spcPct val="110000"/>
+              </a:lnSpc>
+              <a:spcAft>
+                <a:spcPts val="600"/>
+              </a:spcAft>
+            </a:pPr>
+            <a:r>
+              <a:rPr lang="en-US" sz="2400">
+                <a:solidFill>
+                  <a:srgbClr val="D9FBC8"/>
+                </a:solidFill>
+                <a:latin typeface="Space Mono"/>
+                <a:ea typeface="Space Mono"/>
+                <a:cs typeface="Space Mono"/>
+                <a:sym typeface="Space Mono"/>
+              </a:rPr>
+              <a:t>The slots work in pairs. For dual channel, install the modules in the correct slots (the manual shows which).</a:t>
+            </a:r>
+          </a:p>
+        </p:txBody>
+      </p:sp>
+      <p:sp>
+        <p:nvSpPr>
+          <p:cNvPr name="Card 131" id="131"/>
+          <p:cNvSpPr txBox="true"/>
+          <p:nvPr/>
+        </p:nvSpPr>
+        <p:spPr>
+          <a:xfrm>
+            <a:off x="9318981" y="6400000"/>
+            <a:ext cx="7749781" cy="2850000"/>
+          </a:xfrm>
+          <a:prstGeom prst="roundRect">
+            <a:avLst>
+              <a:gd name="adj" fmla="val 4000"/>
+            </a:avLst>
+          </a:prstGeom>
+          <a:solidFill>
+            <a:srgbClr val="0C2810"/>
+          </a:solidFill>
+          <a:ln w="28575">
+            <a:solidFill>
+              <a:srgbClr val="2F7D1F"/>
+            </a:solidFill>
+          </a:ln>
+        </p:spPr>
+        <p:txBody>
+          <a:bodyPr anchor="t" rtlCol="false" tIns="270000" lIns="270000" bIns="270000" rIns="270000">
+            <a:normAutofit/>
+          </a:bodyPr>
+          <a:lstStyle/>
+          <a:p>
+            <a:pPr algn="l">
+              <a:lnSpc>
+                <a:spcPct val="110000"/>
+              </a:lnSpc>
+              <a:spcAft>
+                <a:spcPts val="900"/>
+              </a:spcAft>
+            </a:pPr>
+            <a:r>
+              <a:rPr lang="en-US" sz="3400" b="true">
+                <a:solidFill>
+                  <a:srgbClr val="5EE33A"/>
+                </a:solidFill>
+                <a:latin typeface="Space Mono Bold"/>
+                <a:ea typeface="Space Mono Bold"/>
+                <a:cs typeface="Space Mono Bold"/>
+                <a:sym typeface="Space Mono Bold"/>
+              </a:rPr>
+              <a:t>Chipset and BIOS/UEFI</a:t>
+            </a:r>
+          </a:p>
+          <a:p>
+            <a:pPr algn="l">
+              <a:lnSpc>
+                <a:spcPct val="110000"/>
+              </a:lnSpc>
+              <a:spcAft>
+                <a:spcPts val="600"/>
+              </a:spcAft>
+            </a:pPr>
+            <a:r>
+              <a:rPr lang="en-US" sz="2400">
+                <a:solidFill>
+                  <a:srgbClr val="D9FBC8"/>
+                </a:solidFill>
+                <a:latin typeface="Space Mono"/>
+                <a:ea typeface="Space Mono"/>
+                <a:cs typeface="Space Mono"/>
+                <a:sym typeface="Space Mono"/>
+              </a:rPr>
+              <a:t>They define the supported speeds. In the BIOS/UEFI you can turn on the XMP or EXPO profile of the RAM.</a:t>
+            </a:r>
+          </a:p>
+        </p:txBody>
+      </p:sp>
+    </p:spTree>
+  </p:cSld>
+  <p:clrMapOvr>
+    <a:masterClrMapping/>
+  </p:clrMapOvr>
+  <p:transition spd="slow">
+    <p:push dir="l"/>
+  </p:transition>
+</p:sld>
+</file>
+
+<file path=ppt/slides/slide15.xml><?xml version="1.0" encoding="utf-8"?>
+<p:sld xmlns:p="http://schemas.openxmlformats.org/presentationml/2006/main" xmlns:a="http://schemas.openxmlformats.org/drawingml/2006/main" xmlns:r="http://schemas.openxmlformats.org/officeDocument/2006/relationships">
+  <p:cSld>
+    <p:bg>
+      <p:bgPr>
+        <a:solidFill>
+          <a:srgbClr val="06140A"/>
+        </a:solidFill>
+      </p:bgPr>
+    </p:bg>
+    <p:spTree>
+      <p:nvGrpSpPr>
+        <p:cNvPr id="1" name=""/>
+        <p:cNvGrpSpPr/>
+        <p:nvPr/>
+      </p:nvGrpSpPr>
+      <p:grpSpPr>
+        <a:xfrm>
+          <a:off x="0" y="0"/>
+          <a:ext cx="0" cy="0"/>
+          <a:chOff x="0" y="0"/>
+          <a:chExt cx="0" cy="0"/>
+        </a:xfrm>
+      </p:grpSpPr>
+      <p:grpSp>
+        <p:nvGrpSpPr>
+          <p:cNvPr name="Group 2" id="2"/>
+          <p:cNvGrpSpPr/>
+          <p:nvPr/>
+        </p:nvGrpSpPr>
+        <p:grpSpPr>
+          <a:xfrm rot="0">
+            <a:off x="-9525" y="371475"/>
+            <a:ext cx="18306593" cy="57150"/>
+            <a:chOff x="0" y="0"/>
+            <a:chExt cx="24408790" cy="76200"/>
+          </a:xfrm>
+        </p:grpSpPr>
+        <p:sp>
+          <p:nvSpPr>
+            <p:cNvPr name="Freeform 3" id="3"/>
+            <p:cNvSpPr/>
+            <p:nvPr/>
+          </p:nvSpPr>
+          <p:spPr>
+            <a:xfrm flipH="false" flipV="false" rot="0">
+              <a:off x="0" y="0"/>
+              <a:ext cx="24408764" cy="76200"/>
+            </a:xfrm>
+            <a:custGeom>
+              <a:avLst/>
+              <a:gdLst/>
+              <a:ahLst/>
+              <a:cxnLst/>
+              <a:rect r="r" b="b" t="t" l="l"/>
+              <a:pathLst>
+                <a:path h="76200" w="24408764">
+                  <a:moveTo>
+                    <a:pt x="0" y="0"/>
+                  </a:moveTo>
+                  <a:lnTo>
+                    <a:pt x="24408764" y="0"/>
+                  </a:lnTo>
+                  <a:lnTo>
+                    <a:pt x="24408764" y="76200"/>
+                  </a:lnTo>
+                  <a:lnTo>
+                    <a:pt x="0" y="76200"/>
+                  </a:lnTo>
+                  <a:close/>
+                </a:path>
+              </a:pathLst>
+            </a:custGeom>
+            <a:solidFill>
+              <a:srgbClr val="5EE33A"/>
+            </a:solidFill>
+            <a:ln w="19050" cap="sq">
+              <a:solidFill>
+                <a:srgbClr val="5EE33A"/>
+              </a:solidFill>
+              <a:prstDash val="solid"/>
+              <a:miter/>
+            </a:ln>
+          </p:spPr>
+        </p:sp>
+      </p:grpSp>
+      <p:grpSp>
+        <p:nvGrpSpPr>
+          <p:cNvPr name="Group 4" id="4"/>
+          <p:cNvGrpSpPr/>
+          <p:nvPr/>
+        </p:nvGrpSpPr>
+        <p:grpSpPr>
+          <a:xfrm rot="0">
+            <a:off x="-9525" y="9858346"/>
+            <a:ext cx="18306593" cy="57150"/>
+            <a:chOff x="0" y="0"/>
+            <a:chExt cx="24408790" cy="76200"/>
+          </a:xfrm>
+        </p:grpSpPr>
+        <p:sp>
+          <p:nvSpPr>
+            <p:cNvPr name="Freeform 5" id="5"/>
+            <p:cNvSpPr/>
+            <p:nvPr/>
+          </p:nvSpPr>
+          <p:spPr>
+            <a:xfrm flipH="false" flipV="false" rot="0">
+              <a:off x="0" y="0"/>
+              <a:ext cx="24408764" cy="76200"/>
+            </a:xfrm>
+            <a:custGeom>
+              <a:avLst/>
+              <a:gdLst/>
+              <a:ahLst/>
+              <a:cxnLst/>
+              <a:rect r="r" b="b" t="t" l="l"/>
+              <a:pathLst>
+                <a:path h="76200" w="24408764">
+                  <a:moveTo>
+                    <a:pt x="0" y="0"/>
+                  </a:moveTo>
+                  <a:lnTo>
+                    <a:pt x="24408764" y="0"/>
+                  </a:lnTo>
+                  <a:lnTo>
+                    <a:pt x="24408764" y="76200"/>
+                  </a:lnTo>
+                  <a:lnTo>
+                    <a:pt x="0" y="76200"/>
+                  </a:lnTo>
+                  <a:close/>
+                </a:path>
+              </a:pathLst>
+            </a:custGeom>
+            <a:solidFill>
+              <a:srgbClr val="5EE33A"/>
+            </a:solidFill>
+            <a:ln w="19050" cap="sq">
+              <a:solidFill>
+                <a:srgbClr val="5EE33A"/>
+              </a:solidFill>
+              <a:prstDash val="solid"/>
+              <a:miter/>
+            </a:ln>
+          </p:spPr>
+        </p:sp>
+      </p:grpSp>
+      <p:sp>
+        <p:nvSpPr>
+          <p:cNvPr name="Title 132" id="132"/>
+          <p:cNvSpPr txBox="true"/>
+          <p:nvPr/>
+        </p:nvSpPr>
+        <p:spPr>
+          <a:xfrm>
+            <a:off x="1219200" y="1219200"/>
+            <a:ext cx="15849562" cy="900000"/>
+          </a:xfrm>
+          <a:prstGeom prst="rect">
+            <a:avLst/>
+          </a:prstGeom>
+          <a:noFill/>
+        </p:spPr>
+        <p:txBody>
+          <a:bodyPr anchor="t" rtlCol="false" tIns="0" lIns="0" bIns="0" rIns="0">
+            <a:normAutofit/>
+          </a:bodyPr>
+          <a:lstStyle/>
+          <a:p>
+            <a:pPr algn="l">
+              <a:lnSpc>
+                <a:spcPct val="110000"/>
+              </a:lnSpc>
+              <a:spcAft>
+                <a:spcPts val="0"/>
+              </a:spcAft>
+            </a:pPr>
+            <a:r>
+              <a:rPr lang="en-US" sz="4500" b="true">
+                <a:solidFill>
+                  <a:srgbClr val="5EE33A"/>
+                </a:solidFill>
+                <a:latin typeface="Space Mono Bold"/>
+                <a:ea typeface="Space Mono Bold"/>
+                <a:cs typeface="Space Mono Bold"/>
+                <a:sym typeface="Space Mono Bold"/>
+              </a:rPr>
+              <a:t>&gt;LATENCY, VOLTAGE AND NOTCH</a:t>
+            </a:r>
+          </a:p>
+        </p:txBody>
+      </p:sp>
+      <p:sp>
+        <p:nvSpPr>
+          <p:cNvPr name="Subtitle 133" id="133"/>
+          <p:cNvSpPr txBox="true"/>
+          <p:nvPr/>
+        </p:nvSpPr>
+        <p:spPr>
+          <a:xfrm>
+            <a:off x="1219200" y="2219315"/>
+            <a:ext cx="15849562" cy="700000"/>
+          </a:xfrm>
+          <a:prstGeom prst="rect">
+            <a:avLst/>
+          </a:prstGeom>
+          <a:noFill/>
+        </p:spPr>
+        <p:txBody>
+          <a:bodyPr anchor="t" rtlCol="false" tIns="0" lIns="0" bIns="0" rIns="0">
+            <a:normAutofit/>
+          </a:bodyPr>
+          <a:lstStyle/>
+          <a:p>
+            <a:pPr algn="l">
+              <a:lnSpc>
+                <a:spcPct val="110000"/>
+              </a:lnSpc>
+              <a:spcAft>
+                <a:spcPts val="0"/>
+              </a:spcAft>
+            </a:pPr>
+            <a:r>
+              <a:rPr lang="en-US" sz="2100">
+                <a:solidFill>
+                  <a:srgbClr val="FACC15"/>
+                </a:solidFill>
+                <a:latin typeface="Space Mono"/>
+                <a:ea typeface="Space Mono"/>
+                <a:cs typeface="Space Mono"/>
+                <a:sym typeface="Space Mono"/>
+              </a:rPr>
+              <a:t>More details about DDR4 vs DDR5</a:t>
+            </a:r>
+          </a:p>
+        </p:txBody>
+      </p:sp>
+      <p:sp>
+        <p:nvSpPr>
+          <p:cNvPr name="Card 134" id="134"/>
+          <p:cNvSpPr txBox="true"/>
+          <p:nvPr/>
+        </p:nvSpPr>
+        <p:spPr>
+          <a:xfrm>
+            <a:off x="1219200" y="3300000"/>
+            <a:ext cx="5049854" cy="5900000"/>
+          </a:xfrm>
+          <a:prstGeom prst="roundRect">
+            <a:avLst>
+              <a:gd name="adj" fmla="val 4000"/>
+            </a:avLst>
+          </a:prstGeom>
+          <a:solidFill>
+            <a:srgbClr val="0C2810"/>
+          </a:solidFill>
+          <a:ln w="28575">
+            <a:solidFill>
+              <a:srgbClr val="2F7D1F"/>
+            </a:solidFill>
+          </a:ln>
+        </p:spPr>
+        <p:txBody>
+          <a:bodyPr anchor="t" rtlCol="false" tIns="270000" lIns="270000" bIns="270000" rIns="270000">
+            <a:normAutofit/>
+          </a:bodyPr>
+          <a:lstStyle/>
+          <a:p>
+            <a:pPr algn="l">
+              <a:lnSpc>
+                <a:spcPct val="110000"/>
+              </a:lnSpc>
+              <a:spcAft>
+                <a:spcPts val="900"/>
+              </a:spcAft>
+            </a:pPr>
+            <a:r>
+              <a:rPr lang="en-US" sz="3400" b="true">
+                <a:solidFill>
+                  <a:srgbClr val="5EE33A"/>
+                </a:solidFill>
+                <a:latin typeface="Space Mono Bold"/>
+                <a:ea typeface="Space Mono Bold"/>
+                <a:cs typeface="Space Mono Bold"/>
+                <a:sym typeface="Space Mono Bold"/>
+              </a:rPr>
+              <a:t>Real latency</a:t>
+            </a:r>
+          </a:p>
+          <a:p>
+            <a:pPr algn="l">
+              <a:lnSpc>
+                <a:spcPct val="110000"/>
+              </a:lnSpc>
+              <a:spcAft>
+                <a:spcPts val="600"/>
+              </a:spcAft>
+            </a:pPr>
+            <a:r>
+              <a:rPr lang="en-US" sz="2400">
+                <a:solidFill>
+                  <a:srgbClr val="D9FBC8"/>
+                </a:solidFill>
+                <a:latin typeface="Space Mono"/>
+                <a:ea typeface="Space Mono"/>
+                <a:cs typeface="Space Mono"/>
+                <a:sym typeface="Space Mono"/>
+              </a:rPr>
+              <a:t>Real latency in ns = CL × 2000 / MT/s</a:t>
+            </a:r>
+          </a:p>
+          <a:p>
+            <a:pPr algn="l">
+              <a:lnSpc>
+                <a:spcPct val="110000"/>
+              </a:lnSpc>
+              <a:spcAft>
+                <a:spcPts val="600"/>
+              </a:spcAft>
+            </a:pPr>
+            <a:r>
+              <a:rPr lang="en-US" sz="2400">
+                <a:solidFill>
+                  <a:srgbClr val="D9FBC8"/>
+                </a:solidFill>
+                <a:latin typeface="Space Mono"/>
+                <a:ea typeface="Space Mono"/>
+                <a:cs typeface="Space Mono"/>
+                <a:sym typeface="Space Mono"/>
+              </a:rPr>
+              <a:t>DDR4-3200 CL16 = 10 ns</a:t>
+            </a:r>
+          </a:p>
+          <a:p>
+            <a:pPr algn="l">
+              <a:lnSpc>
+                <a:spcPct val="110000"/>
+              </a:lnSpc>
+              <a:spcAft>
+                <a:spcPts val="600"/>
+              </a:spcAft>
+            </a:pPr>
+            <a:r>
+              <a:rPr lang="en-US" sz="2400">
+                <a:solidFill>
+                  <a:srgbClr val="D9FBC8"/>
+                </a:solidFill>
+                <a:latin typeface="Space Mono"/>
+                <a:ea typeface="Space Mono"/>
+                <a:cs typeface="Space Mono"/>
+                <a:sym typeface="Space Mono"/>
+              </a:rPr>
+              <a:t>DDR5-6000 CL38 ≈ 12.7 ns</a:t>
+            </a:r>
+          </a:p>
+          <a:p>
+            <a:pPr algn="l">
+              <a:lnSpc>
+                <a:spcPct val="110000"/>
+              </a:lnSpc>
+              <a:spcAft>
+                <a:spcPts val="600"/>
+              </a:spcAft>
+            </a:pPr>
+            <a:r>
+              <a:rPr lang="en-US" sz="2400">
+                <a:solidFill>
+                  <a:srgbClr val="D9FBC8"/>
+                </a:solidFill>
+                <a:latin typeface="Space Mono"/>
+                <a:ea typeface="Space Mono"/>
+                <a:cs typeface="Space Mono"/>
+                <a:sym typeface="Space Mono"/>
+              </a:rPr>
+              <a:t>DDR5 has a higher CL, but also a higher speed, so the real latency is similar.</a:t>
+            </a:r>
+          </a:p>
+        </p:txBody>
+      </p:sp>
+      <p:sp>
+        <p:nvSpPr>
+          <p:cNvPr name="Card 135" id="135"/>
+          <p:cNvSpPr txBox="true"/>
+          <p:nvPr/>
+        </p:nvSpPr>
+        <p:spPr>
+          <a:xfrm>
+            <a:off x="6619054" y="3300000"/>
+            <a:ext cx="5049854" cy="5900000"/>
+          </a:xfrm>
+          <a:prstGeom prst="roundRect">
+            <a:avLst>
+              <a:gd name="adj" fmla="val 4000"/>
+            </a:avLst>
+          </a:prstGeom>
+          <a:solidFill>
+            <a:srgbClr val="0C2810"/>
+          </a:solidFill>
+          <a:ln w="28575">
+            <a:solidFill>
+              <a:srgbClr val="2F7D1F"/>
+            </a:solidFill>
+          </a:ln>
+        </p:spPr>
+        <p:txBody>
+          <a:bodyPr anchor="t" rtlCol="false" tIns="270000" lIns="270000" bIns="270000" rIns="270000">
+            <a:normAutofit/>
+          </a:bodyPr>
+          <a:lstStyle/>
+          <a:p>
+            <a:pPr algn="l">
+              <a:lnSpc>
+                <a:spcPct val="110000"/>
+              </a:lnSpc>
+              <a:spcAft>
+                <a:spcPts val="900"/>
+              </a:spcAft>
+            </a:pPr>
+            <a:r>
+              <a:rPr lang="en-US" sz="3400" b="true">
+                <a:solidFill>
+                  <a:srgbClr val="5EE33A"/>
+                </a:solidFill>
+                <a:latin typeface="Space Mono Bold"/>
+                <a:ea typeface="Space Mono Bold"/>
+                <a:cs typeface="Space Mono Bold"/>
+                <a:sym typeface="Space Mono Bold"/>
+              </a:rPr>
+              <a:t>Voltage</a:t>
+            </a:r>
+          </a:p>
+          <a:p>
+            <a:pPr algn="l">
+              <a:lnSpc>
+                <a:spcPct val="110000"/>
+              </a:lnSpc>
+              <a:spcAft>
+                <a:spcPts val="600"/>
+              </a:spcAft>
+            </a:pPr>
+            <a:r>
+              <a:rPr lang="en-US" sz="2400">
+                <a:solidFill>
+                  <a:srgbClr val="D9FBC8"/>
+                </a:solidFill>
+                <a:latin typeface="Space Mono"/>
+                <a:ea typeface="Space Mono"/>
+                <a:cs typeface="Space Mono"/>
+                <a:sym typeface="Space Mono"/>
+              </a:rPr>
+              <a:t>DDR4 works at 1.2 V.</a:t>
+            </a:r>
+          </a:p>
+          <a:p>
+            <a:pPr algn="l">
+              <a:lnSpc>
+                <a:spcPct val="110000"/>
+              </a:lnSpc>
+              <a:spcAft>
+                <a:spcPts val="600"/>
+              </a:spcAft>
+            </a:pPr>
+            <a:r>
+              <a:rPr lang="en-US" sz="2400">
+                <a:solidFill>
+                  <a:srgbClr val="D9FBC8"/>
+                </a:solidFill>
+                <a:latin typeface="Space Mono"/>
+                <a:ea typeface="Space Mono"/>
+                <a:cs typeface="Space Mono"/>
+                <a:sym typeface="Space Mono"/>
+              </a:rPr>
+              <a:t>DDR5 works at 1.1 V.</a:t>
+            </a:r>
+          </a:p>
+          <a:p>
+            <a:pPr algn="l">
+              <a:lnSpc>
+                <a:spcPct val="110000"/>
+              </a:lnSpc>
+              <a:spcAft>
+                <a:spcPts val="600"/>
+              </a:spcAft>
+            </a:pPr>
+            <a:r>
+              <a:rPr lang="en-US" sz="2400">
+                <a:solidFill>
+                  <a:srgbClr val="D9FBC8"/>
+                </a:solidFill>
+                <a:latin typeface="Space Mono"/>
+                <a:ea typeface="Space Mono"/>
+                <a:cs typeface="Space Mono"/>
+                <a:sym typeface="Space Mono"/>
+              </a:rPr>
+              <a:t>So DDR5 uses less power.</a:t>
+            </a:r>
+          </a:p>
+        </p:txBody>
+      </p:sp>
+      <p:sp>
+        <p:nvSpPr>
+          <p:cNvPr name="Card 136" id="136"/>
+          <p:cNvSpPr txBox="true"/>
+          <p:nvPr/>
+        </p:nvSpPr>
+        <p:spPr>
+          <a:xfrm>
+            <a:off x="12018908" y="3300000"/>
+            <a:ext cx="5049854" cy="5900000"/>
+          </a:xfrm>
+          <a:prstGeom prst="roundRect">
+            <a:avLst>
+              <a:gd name="adj" fmla="val 4000"/>
+            </a:avLst>
+          </a:prstGeom>
+          <a:solidFill>
+            <a:srgbClr val="0C2810"/>
+          </a:solidFill>
+          <a:ln w="28575">
+            <a:solidFill>
+              <a:srgbClr val="2F7D1F"/>
+            </a:solidFill>
+          </a:ln>
+        </p:spPr>
+        <p:txBody>
+          <a:bodyPr anchor="t" rtlCol="false" tIns="270000" lIns="270000" bIns="270000" rIns="270000">
+            <a:normAutofit/>
+          </a:bodyPr>
+          <a:lstStyle/>
+          <a:p>
+            <a:pPr algn="l">
+              <a:lnSpc>
+                <a:spcPct val="110000"/>
+              </a:lnSpc>
+              <a:spcAft>
+                <a:spcPts val="900"/>
+              </a:spcAft>
+            </a:pPr>
+            <a:r>
+              <a:rPr lang="en-US" sz="3400" b="true">
+                <a:solidFill>
+                  <a:srgbClr val="5EE33A"/>
+                </a:solidFill>
+                <a:latin typeface="Space Mono Bold"/>
+                <a:ea typeface="Space Mono Bold"/>
+                <a:cs typeface="Space Mono Bold"/>
+                <a:sym typeface="Space Mono Bold"/>
+              </a:rPr>
+              <a:t>Notch</a:t>
+            </a:r>
+          </a:p>
+          <a:p>
+            <a:pPr algn="l">
+              <a:lnSpc>
+                <a:spcPct val="110000"/>
+              </a:lnSpc>
+              <a:spcAft>
+                <a:spcPts val="600"/>
+              </a:spcAft>
+            </a:pPr>
+            <a:r>
+              <a:rPr lang="en-US" sz="2400">
+                <a:solidFill>
+                  <a:srgbClr val="D9FBC8"/>
+                </a:solidFill>
+                <a:latin typeface="Space Mono"/>
+                <a:ea typeface="Space Mono"/>
+                <a:cs typeface="Space Mono"/>
+                <a:sym typeface="Space Mono"/>
+              </a:rPr>
+              <a:t>The notch is in a different position on DDR4 and DDR5.</a:t>
+            </a:r>
+          </a:p>
+          <a:p>
+            <a:pPr algn="l">
+              <a:lnSpc>
+                <a:spcPct val="110000"/>
+              </a:lnSpc>
+              <a:spcAft>
+                <a:spcPts val="600"/>
+              </a:spcAft>
+            </a:pPr>
+            <a:r>
+              <a:rPr lang="en-US" sz="2400">
+                <a:solidFill>
+                  <a:srgbClr val="D9FBC8"/>
+                </a:solidFill>
+                <a:latin typeface="Space Mono"/>
+                <a:ea typeface="Space Mono"/>
+                <a:cs typeface="Space Mono"/>
+                <a:sym typeface="Space Mono"/>
+              </a:rPr>
+              <a:t>This stops you from inserting the wrong type and makes you install it in the correct direction.</a:t>
+            </a:r>
+          </a:p>
+        </p:txBody>
+      </p:sp>
+    </p:spTree>
+  </p:cSld>
+  <p:clrMapOvr>
+    <a:masterClrMapping/>
+  </p:clrMapOvr>
+  <p:transition spd="slow">
+    <p:push dir="l"/>
+  </p:transition>
+</p:sld>
+</file>
+
+<file path=ppt/slides/slide16.xml><?xml version="1.0" encoding="utf-8"?>
+<p:sld xmlns:p="http://schemas.openxmlformats.org/presentationml/2006/main" xmlns:a="http://schemas.openxmlformats.org/drawingml/2006/main" xmlns:r="http://schemas.openxmlformats.org/officeDocument/2006/relationships">
+  <p:cSld>
+    <p:bg>
+      <p:bgPr>
+        <a:solidFill>
+          <a:srgbClr val="06140A"/>
+        </a:solidFill>
+      </p:bgPr>
+    </p:bg>
+    <p:spTree>
+      <p:nvGrpSpPr>
+        <p:cNvPr id="1" name=""/>
+        <p:cNvGrpSpPr/>
+        <p:nvPr/>
+      </p:nvGrpSpPr>
+      <p:grpSpPr>
+        <a:xfrm>
+          <a:off x="0" y="0"/>
+          <a:ext cx="0" cy="0"/>
+          <a:chOff x="0" y="0"/>
+          <a:chExt cx="0" cy="0"/>
+        </a:xfrm>
+      </p:grpSpPr>
+      <p:grpSp>
+        <p:nvGrpSpPr>
+          <p:cNvPr name="Group 2" id="2"/>
+          <p:cNvGrpSpPr/>
+          <p:nvPr/>
+        </p:nvGrpSpPr>
+        <p:grpSpPr>
+          <a:xfrm rot="0">
+            <a:off x="-9525" y="371475"/>
+            <a:ext cx="18306593" cy="57150"/>
+            <a:chOff x="0" y="0"/>
+            <a:chExt cx="24408790" cy="76200"/>
+          </a:xfrm>
+        </p:grpSpPr>
+        <p:sp>
+          <p:nvSpPr>
+            <p:cNvPr name="Freeform 3" id="3"/>
+            <p:cNvSpPr/>
+            <p:nvPr/>
+          </p:nvSpPr>
+          <p:spPr>
+            <a:xfrm flipH="false" flipV="false" rot="0">
+              <a:off x="0" y="0"/>
+              <a:ext cx="24408764" cy="76200"/>
+            </a:xfrm>
+            <a:custGeom>
+              <a:avLst/>
+              <a:gdLst/>
+              <a:ahLst/>
+              <a:cxnLst/>
+              <a:rect r="r" b="b" t="t" l="l"/>
+              <a:pathLst>
+                <a:path h="76200" w="24408764">
+                  <a:moveTo>
+                    <a:pt x="0" y="0"/>
+                  </a:moveTo>
+                  <a:lnTo>
+                    <a:pt x="24408764" y="0"/>
+                  </a:lnTo>
+                  <a:lnTo>
+                    <a:pt x="24408764" y="76200"/>
+                  </a:lnTo>
+                  <a:lnTo>
+                    <a:pt x="0" y="76200"/>
+                  </a:lnTo>
+                  <a:close/>
+                </a:path>
+              </a:pathLst>
+            </a:custGeom>
+            <a:solidFill>
+              <a:srgbClr val="5EE33A"/>
+            </a:solidFill>
+            <a:ln w="19050" cap="sq">
+              <a:solidFill>
+                <a:srgbClr val="5EE33A"/>
+              </a:solidFill>
+              <a:prstDash val="solid"/>
+              <a:miter/>
+            </a:ln>
+          </p:spPr>
+        </p:sp>
+      </p:grpSp>
+      <p:grpSp>
+        <p:nvGrpSpPr>
+          <p:cNvPr name="Group 4" id="4"/>
+          <p:cNvGrpSpPr/>
+          <p:nvPr/>
+        </p:nvGrpSpPr>
+        <p:grpSpPr>
+          <a:xfrm rot="0">
+            <a:off x="-9525" y="9858346"/>
+            <a:ext cx="18306593" cy="57150"/>
+            <a:chOff x="0" y="0"/>
+            <a:chExt cx="24408790" cy="76200"/>
+          </a:xfrm>
+        </p:grpSpPr>
+        <p:sp>
+          <p:nvSpPr>
+            <p:cNvPr name="Freeform 5" id="5"/>
+            <p:cNvSpPr/>
+            <p:nvPr/>
+          </p:nvSpPr>
+          <p:spPr>
+            <a:xfrm flipH="false" flipV="false" rot="0">
+              <a:off x="0" y="0"/>
+              <a:ext cx="24408764" cy="76200"/>
+            </a:xfrm>
+            <a:custGeom>
+              <a:avLst/>
+              <a:gdLst/>
+              <a:ahLst/>
+              <a:cxnLst/>
+              <a:rect r="r" b="b" t="t" l="l"/>
+              <a:pathLst>
+                <a:path h="76200" w="24408764">
+                  <a:moveTo>
+                    <a:pt x="0" y="0"/>
+                  </a:moveTo>
+                  <a:lnTo>
+                    <a:pt x="24408764" y="0"/>
+                  </a:lnTo>
+                  <a:lnTo>
+                    <a:pt x="24408764" y="76200"/>
+                  </a:lnTo>
+                  <a:lnTo>
+                    <a:pt x="0" y="76200"/>
+                  </a:lnTo>
+                  <a:close/>
+                </a:path>
+              </a:pathLst>
+            </a:custGeom>
+            <a:solidFill>
+              <a:srgbClr val="5EE33A"/>
+            </a:solidFill>
+            <a:ln w="19050" cap="sq">
+              <a:solidFill>
+                <a:srgbClr val="5EE33A"/>
+              </a:solidFill>
+              <a:prstDash val="solid"/>
+              <a:miter/>
+            </a:ln>
+          </p:spPr>
+        </p:sp>
+      </p:grpSp>
+      <p:sp>
+        <p:nvSpPr>
+          <p:cNvPr name="Title 137" id="137"/>
+          <p:cNvSpPr txBox="true"/>
+          <p:nvPr/>
+        </p:nvSpPr>
+        <p:spPr>
+          <a:xfrm>
+            <a:off x="1219200" y="1219200"/>
+            <a:ext cx="15849562" cy="900000"/>
+          </a:xfrm>
+          <a:prstGeom prst="rect">
+            <a:avLst/>
+          </a:prstGeom>
+          <a:noFill/>
+        </p:spPr>
+        <p:txBody>
+          <a:bodyPr anchor="t" rtlCol="false" tIns="0" lIns="0" bIns="0" rIns="0">
+            <a:normAutofit/>
+          </a:bodyPr>
+          <a:lstStyle/>
+          <a:p>
+            <a:pPr algn="l">
+              <a:lnSpc>
+                <a:spcPct val="110000"/>
+              </a:lnSpc>
+              <a:spcAft>
+                <a:spcPts val="0"/>
+              </a:spcAft>
+            </a:pPr>
+            <a:r>
+              <a:rPr lang="en-US" sz="4500" b="true">
+                <a:solidFill>
+                  <a:srgbClr val="5EE33A"/>
+                </a:solidFill>
+                <a:latin typeface="Space Mono Bold"/>
+                <a:ea typeface="Space Mono Bold"/>
+                <a:cs typeface="Space Mono Bold"/>
+                <a:sym typeface="Space Mono Bold"/>
+              </a:rPr>
+              <a:t>&gt;REFERENCES</a:t>
+            </a:r>
+          </a:p>
+        </p:txBody>
+      </p:sp>
+      <p:sp>
+        <p:nvSpPr>
+          <p:cNvPr name="Subtitle 138" id="138"/>
+          <p:cNvSpPr txBox="true"/>
+          <p:nvPr/>
+        </p:nvSpPr>
+        <p:spPr>
+          <a:xfrm>
+            <a:off x="1219200" y="2219315"/>
+            <a:ext cx="15849562" cy="700000"/>
+          </a:xfrm>
+          <a:prstGeom prst="rect">
+            <a:avLst/>
+          </a:prstGeom>
+          <a:noFill/>
+        </p:spPr>
+        <p:txBody>
+          <a:bodyPr anchor="t" rtlCol="false" tIns="0" lIns="0" bIns="0" rIns="0">
+            <a:normAutofit/>
+          </a:bodyPr>
+          <a:lstStyle/>
+          <a:p>
+            <a:pPr algn="l">
+              <a:lnSpc>
+                <a:spcPct val="110000"/>
+              </a:lnSpc>
+              <a:spcAft>
+                <a:spcPts val="0"/>
+              </a:spcAft>
+            </a:pPr>
+            <a:r>
+              <a:rPr lang="en-US" sz="2100">
+                <a:solidFill>
+                  <a:srgbClr val="FACC15"/>
+                </a:solidFill>
+                <a:latin typeface="Space Mono"/>
+                <a:ea typeface="Space Mono"/>
+                <a:cs typeface="Space Mono"/>
+                <a:sym typeface="Space Mono"/>
+              </a:rPr>
+              <a:t>All pages accessed on 2026-10-28</a:t>
+            </a:r>
+          </a:p>
+        </p:txBody>
+      </p:sp>
+      <p:sp>
+        <p:nvSpPr>
+          <p:cNvPr name="Card 139" id="139"/>
+          <p:cNvSpPr txBox="true"/>
+          <p:nvPr/>
+        </p:nvSpPr>
+        <p:spPr>
+          <a:xfrm>
+            <a:off x="1219200" y="3000000"/>
+            <a:ext cx="15849562" cy="6400000"/>
+          </a:xfrm>
+          <a:prstGeom prst="roundRect">
+            <a:avLst>
+              <a:gd name="adj" fmla="val 4000"/>
+            </a:avLst>
+          </a:prstGeom>
+          <a:solidFill>
+            <a:srgbClr val="0C2810"/>
+          </a:solidFill>
+          <a:ln w="28575">
+            <a:solidFill>
+              <a:srgbClr val="2F7D1F"/>
+            </a:solidFill>
+          </a:ln>
+        </p:spPr>
+        <p:txBody>
+          <a:bodyPr anchor="t" rtlCol="false" tIns="270000" lIns="270000" bIns="270000" rIns="270000">
+            <a:normAutofit/>
+          </a:bodyPr>
+          <a:lstStyle/>
+          <a:p>
+            <a:pPr algn="l">
+              <a:lnSpc>
+                <a:spcPct val="110000"/>
+              </a:lnSpc>
+              <a:spcAft>
+                <a:spcPts val="0"/>
+              </a:spcAft>
+            </a:pPr>
+            <a:r>
+              <a:rPr lang="en-US" sz="2000" b="true">
+                <a:solidFill>
+                  <a:srgbClr val="5EE33A"/>
+                </a:solidFill>
+                <a:latin typeface="Space Mono Bold"/>
+                <a:ea typeface="Space Mono Bold"/>
+                <a:cs typeface="Space Mono Bold"/>
+                <a:sym typeface="Space Mono Bold"/>
+              </a:rPr>
+              <a:t>Kingston — What is computer memory</a:t>
+            </a:r>
+          </a:p>
+          <a:p>
+            <a:pPr algn="l">
+              <a:lnSpc>
+                <a:spcPct val="110000"/>
+              </a:lnSpc>
+              <a:spcAft>
+                <a:spcPts val="800"/>
+              </a:spcAft>
+            </a:pPr>
+            <a:r>
+              <a:rPr lang="en-US" sz="1400">
+                <a:solidFill>
+                  <a:srgbClr val="D9FBC8"/>
+                </a:solidFill>
+                <a:latin typeface="Space Mono"/>
+                <a:ea typeface="Space Mono"/>
+                <a:cs typeface="Space Mono"/>
+                <a:sym typeface="Space Mono"/>
+              </a:rPr>
+              <a:t>https://www.kingston.com/es/blog/pc-performance/what-is-computer-memory</a:t>
+            </a:r>
+          </a:p>
+          <a:p>
+            <a:pPr algn="l">
+              <a:lnSpc>
+                <a:spcPct val="110000"/>
+              </a:lnSpc>
+              <a:spcAft>
+                <a:spcPts val="0"/>
+              </a:spcAft>
+            </a:pPr>
+            <a:r>
+              <a:rPr lang="en-US" sz="2000" b="true">
+                <a:solidFill>
+                  <a:srgbClr val="5EE33A"/>
+                </a:solidFill>
+                <a:latin typeface="Space Mono Bold"/>
+                <a:ea typeface="Space Mono Bold"/>
+                <a:cs typeface="Space Mono Bold"/>
+                <a:sym typeface="Space Mono Bold"/>
+              </a:rPr>
+              <a:t>Crucial — Difference among DDR2, DDR3, DDR4 and DDR5 memory</a:t>
+            </a:r>
+          </a:p>
+          <a:p>
+            <a:pPr algn="l">
+              <a:lnSpc>
+                <a:spcPct val="110000"/>
+              </a:lnSpc>
+              <a:spcAft>
+                <a:spcPts val="800"/>
+              </a:spcAft>
+            </a:pPr>
+            <a:r>
+              <a:rPr lang="en-US" sz="1400">
+                <a:solidFill>
+                  <a:srgbClr val="D9FBC8"/>
+                </a:solidFill>
+                <a:latin typeface="Space Mono"/>
+                <a:ea typeface="Space Mono"/>
+                <a:cs typeface="Space Mono"/>
+                <a:sym typeface="Space Mono"/>
+              </a:rPr>
+              <a:t>https://test.crucial.com/articles/about-memory/difference-among-ddr2-ddr3-ddr4-and-ddr5-memory</a:t>
+            </a:r>
+          </a:p>
+          <a:p>
+            <a:pPr algn="l">
+              <a:lnSpc>
+                <a:spcPct val="110000"/>
+              </a:lnSpc>
+              <a:spcAft>
+                <a:spcPts val="0"/>
+              </a:spcAft>
+            </a:pPr>
+            <a:r>
+              <a:rPr lang="en-US" sz="2000" b="true">
+                <a:solidFill>
+                  <a:srgbClr val="5EE33A"/>
+                </a:solidFill>
+                <a:latin typeface="Space Mono Bold"/>
+                <a:ea typeface="Space Mono Bold"/>
+                <a:cs typeface="Space Mono Bold"/>
+                <a:sym typeface="Space Mono Bold"/>
+              </a:rPr>
+              <a:t>TechTarget — Compare DIMM vs SO-DIMM features and uses</a:t>
+            </a:r>
+          </a:p>
+          <a:p>
+            <a:pPr algn="l">
+              <a:lnSpc>
+                <a:spcPct val="110000"/>
+              </a:lnSpc>
+              <a:spcAft>
+                <a:spcPts val="800"/>
+              </a:spcAft>
+            </a:pPr>
+            <a:r>
+              <a:rPr lang="en-US" sz="1400">
+                <a:solidFill>
+                  <a:srgbClr val="D9FBC8"/>
+                </a:solidFill>
+                <a:latin typeface="Space Mono"/>
+                <a:ea typeface="Space Mono"/>
+                <a:cs typeface="Space Mono"/>
+                <a:sym typeface="Space Mono"/>
+              </a:rPr>
+              <a:t>https://www.techtarget.com/it-infrastructure/tip/Compare-DIMM-vs-SO-DIMM-features-uses</a:t>
+            </a:r>
+          </a:p>
+          <a:p>
+            <a:pPr algn="l">
+              <a:lnSpc>
+                <a:spcPct val="110000"/>
+              </a:lnSpc>
+              <a:spcAft>
+                <a:spcPts val="0"/>
+              </a:spcAft>
+            </a:pPr>
+            <a:r>
+              <a:rPr lang="en-US" sz="2000" b="true">
+                <a:solidFill>
+                  <a:srgbClr val="5EE33A"/>
+                </a:solidFill>
+                <a:latin typeface="Space Mono Bold"/>
+                <a:ea typeface="Space Mono Bold"/>
+                <a:cs typeface="Space Mono Bold"/>
+                <a:sym typeface="Space Mono Bold"/>
+              </a:rPr>
+              <a:t>Kingston — Glossary</a:t>
+            </a:r>
+          </a:p>
+          <a:p>
+            <a:pPr algn="l">
+              <a:lnSpc>
+                <a:spcPct val="110000"/>
+              </a:lnSpc>
+              <a:spcAft>
+                <a:spcPts val="800"/>
+              </a:spcAft>
+            </a:pPr>
+            <a:r>
+              <a:rPr lang="en-US" sz="1400">
+                <a:solidFill>
+                  <a:srgbClr val="D9FBC8"/>
+                </a:solidFill>
+                <a:latin typeface="Space Mono"/>
+                <a:ea typeface="Space Mono"/>
+                <a:cs typeface="Space Mono"/>
+                <a:sym typeface="Space Mono"/>
+              </a:rPr>
+              <a:t>https://www.kingston.com/en/memory/kingston-glossary</a:t>
+            </a:r>
+          </a:p>
+          <a:p>
+            <a:pPr algn="l">
+              <a:lnSpc>
+                <a:spcPct val="110000"/>
+              </a:lnSpc>
+              <a:spcAft>
+                <a:spcPts val="0"/>
+              </a:spcAft>
+            </a:pPr>
+            <a:r>
+              <a:rPr lang="en-US" sz="2000" b="true">
+                <a:solidFill>
+                  <a:srgbClr val="5EE33A"/>
+                </a:solidFill>
+                <a:latin typeface="Space Mono Bold"/>
+                <a:ea typeface="Space Mono Bold"/>
+                <a:cs typeface="Space Mono Bold"/>
+                <a:sym typeface="Space Mono Bold"/>
+              </a:rPr>
+              <a:t>PcComponentes — Forgeon Cyclone PLUS V2</a:t>
+            </a:r>
+          </a:p>
+          <a:p>
+            <a:pPr algn="l">
+              <a:lnSpc>
+                <a:spcPct val="110000"/>
+              </a:lnSpc>
+              <a:spcAft>
+                <a:spcPts val="800"/>
+              </a:spcAft>
+            </a:pPr>
+            <a:r>
+              <a:rPr lang="en-US" sz="1400">
+                <a:solidFill>
+                  <a:srgbClr val="D9FBC8"/>
+                </a:solidFill>
+                <a:latin typeface="Space Mono"/>
+                <a:ea typeface="Space Mono"/>
+                <a:cs typeface="Space Mono"/>
+                <a:sym typeface="Space Mono"/>
+              </a:rPr>
+              <a:t>https://www.pccomponentes.com/memoria-ram-forgeon-cyclone-plus-v2-ddr4-3200-mhz-16gb-2x8gb-cl16-negra</a:t>
+            </a:r>
+          </a:p>
+          <a:p>
+            <a:pPr algn="l">
+              <a:lnSpc>
+                <a:spcPct val="110000"/>
+              </a:lnSpc>
+              <a:spcAft>
+                <a:spcPts val="0"/>
+              </a:spcAft>
+            </a:pPr>
+            <a:r>
+              <a:rPr lang="en-US" sz="2000" b="true">
+                <a:solidFill>
+                  <a:srgbClr val="5EE33A"/>
+                </a:solidFill>
+                <a:latin typeface="Space Mono Bold"/>
+                <a:ea typeface="Space Mono Bold"/>
+                <a:cs typeface="Space Mono Bold"/>
+                <a:sym typeface="Space Mono Bold"/>
+              </a:rPr>
+              <a:t>PcComponentes — G.Skill Ripjaws V</a:t>
+            </a:r>
+          </a:p>
+          <a:p>
+            <a:pPr algn="l">
+              <a:lnSpc>
+                <a:spcPct val="110000"/>
+              </a:lnSpc>
+              <a:spcAft>
+                <a:spcPts val="800"/>
+              </a:spcAft>
+            </a:pPr>
+            <a:r>
+              <a:rPr lang="en-US" sz="1400">
+                <a:solidFill>
+                  <a:srgbClr val="D9FBC8"/>
+                </a:solidFill>
+                <a:latin typeface="Space Mono"/>
+                <a:ea typeface="Space Mono"/>
+                <a:cs typeface="Space Mono"/>
+                <a:sym typeface="Space Mono"/>
+              </a:rPr>
+              <a:t>https://www.pccomponentes.com/memoria-ram-g-skill-ripjaws-v-ddr4-3600mhz-pc4-28800-32gb-2x16gb-cl18</a:t>
+            </a:r>
+          </a:p>
+          <a:p>
+            <a:pPr algn="l">
+              <a:lnSpc>
+                <a:spcPct val="110000"/>
+              </a:lnSpc>
+              <a:spcAft>
+                <a:spcPts val="0"/>
+              </a:spcAft>
+            </a:pPr>
+            <a:r>
+              <a:rPr lang="en-US" sz="2000" b="true">
+                <a:solidFill>
+                  <a:srgbClr val="5EE33A"/>
+                </a:solidFill>
+                <a:latin typeface="Space Mono Bold"/>
+                <a:ea typeface="Space Mono Bold"/>
+                <a:cs typeface="Space Mono Bold"/>
+                <a:sym typeface="Space Mono Bold"/>
+              </a:rPr>
+              <a:t>PcComponentes — Kingston FURY Beast DDR5</a:t>
+            </a:r>
+          </a:p>
+          <a:p>
+            <a:pPr algn="l">
+              <a:lnSpc>
+                <a:spcPct val="110000"/>
+              </a:lnSpc>
+              <a:spcAft>
+                <a:spcPts val="800"/>
+              </a:spcAft>
+            </a:pPr>
+            <a:r>
+              <a:rPr lang="en-US" sz="1400">
+                <a:solidFill>
+                  <a:srgbClr val="D9FBC8"/>
+                </a:solidFill>
+                <a:latin typeface="Space Mono"/>
+                <a:ea typeface="Space Mono"/>
+                <a:cs typeface="Space Mono"/>
+                <a:sym typeface="Space Mono"/>
+              </a:rPr>
+              <a:t>https://www.pccomponentes.com/kingston-fury-beast-ddr5-5600mhz-32gb-2x16gb-cl36</a:t>
+            </a:r>
+          </a:p>
+          <a:p>
+            <a:pPr algn="l">
+              <a:lnSpc>
+                <a:spcPct val="110000"/>
+              </a:lnSpc>
+              <a:spcAft>
+                <a:spcPts val="0"/>
+              </a:spcAft>
+            </a:pPr>
+            <a:r>
+              <a:rPr lang="en-US" sz="2000" b="true">
+                <a:solidFill>
+                  <a:srgbClr val="5EE33A"/>
+                </a:solidFill>
+                <a:latin typeface="Space Mono Bold"/>
+                <a:ea typeface="Space Mono Bold"/>
+                <a:cs typeface="Space Mono Bold"/>
+                <a:sym typeface="Space Mono Bold"/>
+              </a:rPr>
+              <a:t>PcComponentes — Corsair Vengeance DDR5</a:t>
+            </a:r>
+          </a:p>
+          <a:p>
+            <a:pPr algn="l">
+              <a:lnSpc>
+                <a:spcPct val="110000"/>
+              </a:lnSpc>
+              <a:spcAft>
+                <a:spcPts val="800"/>
+              </a:spcAft>
+            </a:pPr>
+            <a:r>
+              <a:rPr lang="en-US" sz="1400">
+                <a:solidFill>
+                  <a:srgbClr val="D9FBC8"/>
+                </a:solidFill>
+                <a:latin typeface="Space Mono"/>
+                <a:ea typeface="Space Mono"/>
+                <a:cs typeface="Space Mono"/>
+                <a:sym typeface="Space Mono"/>
+              </a:rPr>
+              <a:t>https://www.pccomponentes.com/memoria-ram-corsair-vengeance-32gb-2x16gb-ddr5-6000mhz-cl38-intel-xmp-negra</a:t>
+            </a:r>
+          </a:p>
+        </p:txBody>
+      </p:sp>
+    </p:spTree>
+  </p:cSld>
+  <p:clrMapOvr>
+    <a:masterClrMapping/>
+  </p:clrMapOvr>
+  <p:transition spd="slow">
+    <p:push dir="l"/>
+  </p:transition>
+</p:sld>
+</file>
+
+<file path=ppt/slides/slide17.xml><?xml version="1.0" encoding="utf-8"?>
+<p:sld xmlns:p="http://schemas.openxmlformats.org/presentationml/2006/main" xmlns:a="http://schemas.openxmlformats.org/drawingml/2006/main" xmlns:r="http://schemas.openxmlformats.org/officeDocument/2006/relationships">
+  <p:cSld>
+    <p:bg>
+      <p:bgPr>
+        <a:solidFill>
+          <a:srgbClr val="06140A"/>
+        </a:solidFill>
+      </p:bgPr>
+    </p:bg>
+    <p:spTree>
+      <p:nvGrpSpPr>
+        <p:cNvPr id="1" name=""/>
+        <p:cNvGrpSpPr/>
+        <p:nvPr/>
+      </p:nvGrpSpPr>
+      <p:grpSpPr>
+        <a:xfrm>
+          <a:off x="0" y="0"/>
+          <a:ext cx="0" cy="0"/>
+          <a:chOff x="0" y="0"/>
+          <a:chExt cx="0" cy="0"/>
+        </a:xfrm>
+      </p:grpSpPr>
+      <p:grpSp>
+        <p:nvGrpSpPr>
+          <p:cNvPr name="Group 2" id="2"/>
+          <p:cNvGrpSpPr/>
+          <p:nvPr/>
+        </p:nvGrpSpPr>
+        <p:grpSpPr>
+          <a:xfrm rot="0">
+            <a:off x="-9525" y="371475"/>
+            <a:ext cx="18306593" cy="57150"/>
+            <a:chOff x="0" y="0"/>
+            <a:chExt cx="24408790" cy="76200"/>
+          </a:xfrm>
+        </p:grpSpPr>
+        <p:sp>
+          <p:nvSpPr>
+            <p:cNvPr name="Freeform 3" id="3"/>
+            <p:cNvSpPr/>
+            <p:nvPr/>
+          </p:nvSpPr>
+          <p:spPr>
+            <a:xfrm flipH="false" flipV="false" rot="0">
+              <a:off x="0" y="0"/>
+              <a:ext cx="24408764" cy="76200"/>
+            </a:xfrm>
+            <a:custGeom>
+              <a:avLst/>
+              <a:gdLst/>
+              <a:ahLst/>
+              <a:cxnLst/>
+              <a:rect r="r" b="b" t="t" l="l"/>
+              <a:pathLst>
+                <a:path h="76200" w="24408764">
+                  <a:moveTo>
+                    <a:pt x="0" y="0"/>
+                  </a:moveTo>
+                  <a:lnTo>
+                    <a:pt x="24408764" y="0"/>
+                  </a:lnTo>
+                  <a:lnTo>
+                    <a:pt x="24408764" y="76200"/>
+                  </a:lnTo>
+                  <a:lnTo>
+                    <a:pt x="0" y="76200"/>
+                  </a:lnTo>
+                  <a:close/>
+                </a:path>
+              </a:pathLst>
+            </a:custGeom>
+            <a:solidFill>
+              <a:srgbClr val="5EE33A"/>
+            </a:solidFill>
+            <a:ln w="19050" cap="sq">
+              <a:solidFill>
+                <a:srgbClr val="5EE33A"/>
+              </a:solidFill>
+              <a:prstDash val="solid"/>
+              <a:miter/>
+            </a:ln>
+          </p:spPr>
+        </p:sp>
+      </p:grpSp>
+      <p:grpSp>
+        <p:nvGrpSpPr>
+          <p:cNvPr name="Group 4" id="4"/>
+          <p:cNvGrpSpPr/>
+          <p:nvPr/>
+        </p:nvGrpSpPr>
+        <p:grpSpPr>
+          <a:xfrm rot="0">
+            <a:off x="-9525" y="9858346"/>
+            <a:ext cx="18306593" cy="57150"/>
+            <a:chOff x="0" y="0"/>
+            <a:chExt cx="24408790" cy="76200"/>
+          </a:xfrm>
+        </p:grpSpPr>
+        <p:sp>
+          <p:nvSpPr>
+            <p:cNvPr name="Freeform 5" id="5"/>
+            <p:cNvSpPr/>
+            <p:nvPr/>
+          </p:nvSpPr>
+          <p:spPr>
+            <a:xfrm flipH="false" flipV="false" rot="0">
+              <a:off x="0" y="0"/>
+              <a:ext cx="24408764" cy="76200"/>
+            </a:xfrm>
+            <a:custGeom>
+              <a:avLst/>
+              <a:gdLst/>
+              <a:ahLst/>
+              <a:cxnLst/>
+              <a:rect r="r" b="b" t="t" l="l"/>
+              <a:pathLst>
+                <a:path h="76200" w="24408764">
+                  <a:moveTo>
+                    <a:pt x="0" y="0"/>
+                  </a:moveTo>
+                  <a:lnTo>
+                    <a:pt x="24408764" y="0"/>
+                  </a:lnTo>
+                  <a:lnTo>
+                    <a:pt x="24408764" y="76200"/>
+                  </a:lnTo>
+                  <a:lnTo>
+                    <a:pt x="0" y="76200"/>
+                  </a:lnTo>
+                  <a:close/>
+                </a:path>
+              </a:pathLst>
+            </a:custGeom>
+            <a:solidFill>
+              <a:srgbClr val="5EE33A"/>
+            </a:solidFill>
+            <a:ln w="19050" cap="sq">
+              <a:solidFill>
+                <a:srgbClr val="5EE33A"/>
+              </a:solidFill>
+              <a:prstDash val="solid"/>
+              <a:miter/>
+            </a:ln>
+          </p:spPr>
+        </p:sp>
+      </p:grpSp>
+      <p:sp>
+        <p:nvSpPr>
+          <p:cNvPr name="Title 140" id="140"/>
+          <p:cNvSpPr txBox="true"/>
+          <p:nvPr/>
+        </p:nvSpPr>
+        <p:spPr>
+          <a:xfrm>
+            <a:off x="1219200" y="1219200"/>
+            <a:ext cx="15849562" cy="900000"/>
+          </a:xfrm>
+          <a:prstGeom prst="rect">
+            <a:avLst/>
+          </a:prstGeom>
+          <a:noFill/>
+        </p:spPr>
+        <p:txBody>
+          <a:bodyPr anchor="t" rtlCol="false" tIns="0" lIns="0" bIns="0" rIns="0">
+            <a:normAutofit/>
+          </a:bodyPr>
+          <a:lstStyle/>
+          <a:p>
+            <a:pPr algn="l">
+              <a:lnSpc>
+                <a:spcPct val="110000"/>
+              </a:lnSpc>
+              <a:spcAft>
+                <a:spcPts val="0"/>
+              </a:spcAft>
+            </a:pPr>
+            <a:r>
+              <a:rPr lang="en-US" sz="4500" b="true">
+                <a:solidFill>
+                  <a:srgbClr val="5EE33A"/>
+                </a:solidFill>
+                <a:latin typeface="Space Mono Bold"/>
+                <a:ea typeface="Space Mono Bold"/>
+                <a:cs typeface="Space Mono Bold"/>
+                <a:sym typeface="Space Mono Bold"/>
+              </a:rPr>
+              <a:t>&gt;KAHOOT QUIZ</a:t>
+            </a:r>
+          </a:p>
+        </p:txBody>
+      </p:sp>
+      <p:sp>
+        <p:nvSpPr>
+          <p:cNvPr name="Subtitle 141" id="141"/>
+          <p:cNvSpPr txBox="true"/>
+          <p:nvPr/>
+        </p:nvSpPr>
+        <p:spPr>
+          <a:xfrm>
+            <a:off x="1219200" y="2219315"/>
+            <a:ext cx="15849562" cy="700000"/>
+          </a:xfrm>
+          <a:prstGeom prst="rect">
+            <a:avLst/>
+          </a:prstGeom>
+          <a:noFill/>
+        </p:spPr>
+        <p:txBody>
+          <a:bodyPr anchor="t" rtlCol="false" tIns="0" lIns="0" bIns="0" rIns="0">
+            <a:normAutofit/>
+          </a:bodyPr>
+          <a:lstStyle/>
+          <a:p>
+            <a:pPr algn="l">
+              <a:lnSpc>
+                <a:spcPct val="110000"/>
+              </a:lnSpc>
+              <a:spcAft>
+                <a:spcPts val="0"/>
+              </a:spcAft>
+            </a:pPr>
+            <a:r>
+              <a:rPr lang="en-US" sz="2100">
+                <a:solidFill>
+                  <a:srgbClr val="FACC15"/>
+                </a:solidFill>
+                <a:latin typeface="Space Mono"/>
+                <a:ea typeface="Space Mono"/>
+                <a:cs typeface="Space Mono"/>
+                <a:sym typeface="Space Mono"/>
+              </a:rPr>
+              <a:t>Test what you learned!</a:t>
+            </a:r>
+          </a:p>
+        </p:txBody>
+      </p:sp>
+      <p:sp>
+        <p:nvSpPr>
+          <p:cNvPr name="Card 142" id="142"/>
+          <p:cNvSpPr txBox="true"/>
+          <p:nvPr/>
+        </p:nvSpPr>
+        <p:spPr>
+          <a:xfrm>
+            <a:off x="1219200" y="3300000"/>
+            <a:ext cx="15849562" cy="5000000"/>
+          </a:xfrm>
+          <a:prstGeom prst="roundRect">
+            <a:avLst>
+              <a:gd name="adj" fmla="val 4000"/>
+            </a:avLst>
+          </a:prstGeom>
+          <a:solidFill>
+            <a:srgbClr val="0C2810"/>
+          </a:solidFill>
+          <a:ln w="28575">
+            <a:solidFill>
+              <a:srgbClr val="2F7D1F"/>
+            </a:solidFill>
+          </a:ln>
+        </p:spPr>
+        <p:txBody>
+          <a:bodyPr anchor="ctr" rtlCol="false" tIns="270000" lIns="270000" bIns="270000" rIns="270000">
+            <a:normAutofit/>
+          </a:bodyPr>
+          <a:lstStyle/>
+          <a:p>
+            <a:pPr algn="l">
+              <a:lnSpc>
+                <a:spcPct val="110000"/>
+              </a:lnSpc>
+              <a:spcAft>
+                <a:spcPts val="1200"/>
+              </a:spcAft>
+            </a:pPr>
+            <a:r>
+              <a:rPr lang="en-US" sz="3600" b="true">
+                <a:solidFill>
+                  <a:srgbClr val="5EE33A"/>
+                </a:solidFill>
+                <a:latin typeface="Space Mono Bold"/>
+                <a:ea typeface="Space Mono Bold"/>
+                <a:cs typeface="Space Mono Bold"/>
+                <a:sym typeface="Space Mono Bold"/>
+              </a:rPr>
+              <a:t>Play my quiz here:</a:t>
+            </a:r>
+          </a:p>
+          <a:p>
+            <a:pPr algn="l">
+              <a:lnSpc>
+                <a:spcPct val="110000"/>
+              </a:lnSpc>
+              <a:spcAft>
+                <a:spcPts val="0"/>
+              </a:spcAft>
+            </a:pPr>
+            <a:r>
+              <a:rPr lang="en-US" sz="2200">
+                <a:solidFill>
+                  <a:srgbClr val="FACC15"/>
+                </a:solidFill>
+                <a:latin typeface="Space Mono"/>
+                <a:ea typeface="Space Mono"/>
+                <a:cs typeface="Space Mono"/>
+                <a:sym typeface="Space Mono"/>
+              </a:rPr>
+              <a:t>https://create.kahoot.it/share/ram-test/7a3f937f-a1da-4a97-8288-bdef654acedf</a:t>
+            </a:r>
+          </a:p>
+        </p:txBody>
+      </p:sp>
+    </p:spTree>
+  </p:cSld>
+  <p:clrMapOvr>
+    <a:masterClrMapping/>
+  </p:clrMapOvr>
+  <p:transition spd="slow">
+    <p:push dir="l"/>
+  </p:transition>
 </p:sld>
 </file>
 
